--- a/1-基础通识部分/第2课.pptx
+++ b/1-基础通识部分/第2课.pptx
@@ -5,28 +5,28 @@
     <p:sldMasterId id="2147483648" r:id="rId1"/>
   </p:sldMasterIdLst>
   <p:notesMasterIdLst>
-    <p:notesMasterId r:id="rId15"/>
+    <p:notesMasterId r:id="rId5"/>
   </p:notesMasterIdLst>
   <p:handoutMasterIdLst>
-    <p:handoutMasterId r:id="rId16"/>
+    <p:handoutMasterId r:id="rId17"/>
   </p:handoutMasterIdLst>
   <p:sldIdLst>
-    <p:sldId id="256" r:id="rId2"/>
-    <p:sldId id="292" r:id="rId3"/>
-    <p:sldId id="291" r:id="rId4"/>
-    <p:sldId id="278" r:id="rId5"/>
-    <p:sldId id="293" r:id="rId6"/>
-    <p:sldId id="294" r:id="rId7"/>
-    <p:sldId id="300" r:id="rId8"/>
-    <p:sldId id="295" r:id="rId9"/>
-    <p:sldId id="298" r:id="rId10"/>
-    <p:sldId id="299" r:id="rId11"/>
-    <p:sldId id="296" r:id="rId12"/>
-    <p:sldId id="297" r:id="rId13"/>
-    <p:sldId id="274" r:id="rId14"/>
+    <p:sldId id="256" r:id="rId3"/>
+    <p:sldId id="292" r:id="rId4"/>
+    <p:sldId id="291" r:id="rId6"/>
+    <p:sldId id="278" r:id="rId7"/>
+    <p:sldId id="293" r:id="rId8"/>
+    <p:sldId id="294" r:id="rId9"/>
+    <p:sldId id="300" r:id="rId10"/>
+    <p:sldId id="295" r:id="rId11"/>
+    <p:sldId id="298" r:id="rId12"/>
+    <p:sldId id="299" r:id="rId13"/>
+    <p:sldId id="296" r:id="rId14"/>
+    <p:sldId id="297" r:id="rId15"/>
+    <p:sldId id="274" r:id="rId16"/>
   </p:sldIdLst>
   <p:sldSz cx="12192000" cy="6858000"/>
-  <p:notesSz cx="7104063" cy="10234613"/>
+  <p:notesSz cx="7103745" cy="10234295"/>
   <p:defaultTextStyle>
     <a:defPPr>
       <a:defRPr lang="zh-CN"/>
@@ -223,7 +223,6 @@
           <a:p>
             <a:fld id="{0F9B84EA-7D68-4D60-9CB1-D50884785D1C}" type="datetimeFigureOut">
               <a:rPr lang="zh-CN" altLang="en-US" smtClean="0"/>
-              <a:t>2026/9/6</a:t>
             </a:fld>
             <a:endParaRPr lang="zh-CN" altLang="en-US"/>
           </a:p>
@@ -289,18 +288,12 @@
           <a:p>
             <a:fld id="{8D4E0FC9-F1F8-4FAE-9988-3BA365CFD46F}" type="slidenum">
               <a:rPr lang="zh-CN" altLang="en-US" smtClean="0"/>
-              <a:t>‹#›</a:t>
             </a:fld>
             <a:endParaRPr lang="zh-CN" altLang="en-US"/>
           </a:p>
         </p:txBody>
       </p:sp>
     </p:spTree>
-    <p:extLst>
-      <p:ext uri="{BB962C8B-B14F-4D97-AF65-F5344CB8AC3E}">
-        <p14:creationId xmlns:p14="http://schemas.microsoft.com/office/powerpoint/2010/main" val="1"/>
-      </p:ext>
-    </p:extLst>
   </p:cSld>
   <p:clrMap bg1="lt1" tx1="dk1" bg2="lt2" tx2="dk2" accent1="accent1" accent2="accent2" accent3="accent3" accent4="accent4" accent5="accent5" accent6="accent6" hlink="hlink" folHlink="folHlink"/>
 </p:handoutMaster>
@@ -388,7 +381,6 @@
           <a:p>
             <a:fld id="{D6C8D182-E4C8-4120-9249-FC9774456FFA}" type="datetimeFigureOut">
               <a:rPr lang="zh-CN" altLang="en-US" smtClean="0"/>
-              <a:t>2026/9/6</a:t>
             </a:fld>
             <a:endParaRPr lang="zh-CN" altLang="en-US"/>
           </a:p>
@@ -455,6 +447,7 @@
               <a:rPr lang="zh-CN" altLang="en-US"/>
               <a:t>编辑母版文本样式</a:t>
             </a:r>
+            <a:endParaRPr lang="zh-CN" altLang="en-US"/>
           </a:p>
           <a:p>
             <a:pPr lvl="1"/>
@@ -462,6 +455,7 @@
               <a:rPr lang="zh-CN" altLang="en-US"/>
               <a:t>第二级</a:t>
             </a:r>
+            <a:endParaRPr lang="zh-CN" altLang="en-US"/>
           </a:p>
           <a:p>
             <a:pPr lvl="2"/>
@@ -469,6 +463,7 @@
               <a:rPr lang="zh-CN" altLang="en-US"/>
               <a:t>第三级</a:t>
             </a:r>
+            <a:endParaRPr lang="zh-CN" altLang="en-US"/>
           </a:p>
           <a:p>
             <a:pPr lvl="3"/>
@@ -476,6 +471,7 @@
               <a:rPr lang="zh-CN" altLang="en-US"/>
               <a:t>第四级</a:t>
             </a:r>
+            <a:endParaRPr lang="zh-CN" altLang="en-US"/>
           </a:p>
           <a:p>
             <a:pPr lvl="4"/>
@@ -483,6 +479,7 @@
               <a:rPr lang="zh-CN" altLang="en-US"/>
               <a:t>第五级</a:t>
             </a:r>
+            <a:endParaRPr lang="zh-CN" altLang="en-US"/>
           </a:p>
         </p:txBody>
       </p:sp>
@@ -546,7 +543,6 @@
           <a:p>
             <a:fld id="{85D0DACE-38E0-42D2-9336-2B707D34BC6D}" type="slidenum">
               <a:rPr lang="zh-CN" altLang="en-US" smtClean="0"/>
-              <a:t>‹#›</a:t>
             </a:fld>
             <a:endParaRPr lang="zh-CN" altLang="en-US"/>
           </a:p>
@@ -695,7 +691,7 @@
           <a:lstStyle/>
           <a:p>
             <a:pPr marL="171450" indent="-171450">
-              <a:buFont typeface="Arial" panose="020B0604020202020204" pitchFamily="34" charset="0"/>
+              <a:buFont typeface="Arial" panose="02080604020202020204" pitchFamily="34" charset="0"/>
               <a:buChar char="•"/>
             </a:pPr>
             <a:r>
@@ -714,7 +710,7 @@
           </a:p>
           <a:p>
             <a:pPr marL="171450" indent="-171450">
-              <a:buFont typeface="Arial" panose="020B0604020202020204" pitchFamily="34" charset="0"/>
+              <a:buFont typeface="Arial" panose="02080604020202020204" pitchFamily="34" charset="0"/>
               <a:buChar char="•"/>
             </a:pPr>
             <a:r>
@@ -786,7 +782,7 @@
           <a:lstStyle/>
           <a:p>
             <a:pPr marL="171450" indent="-171450">
-              <a:buFont typeface="Arial" panose="020B0604020202020204" pitchFamily="34" charset="0"/>
+              <a:buFont typeface="Arial" panose="02080604020202020204" pitchFamily="34" charset="0"/>
               <a:buChar char="•"/>
             </a:pPr>
             <a:r>
@@ -805,17 +801,18 @@
               <a:rPr lang="en-US" altLang="zh-CN" dirty="0"/>
               <a:t>……</a:t>
             </a:r>
+            <a:endParaRPr lang="en-US" altLang="zh-CN" dirty="0"/>
           </a:p>
           <a:p>
             <a:pPr marL="171450" indent="-171450">
-              <a:buFont typeface="Arial" panose="020B0604020202020204" pitchFamily="34" charset="0"/>
+              <a:buFont typeface="Arial" panose="02080604020202020204" pitchFamily="34" charset="0"/>
               <a:buChar char="•"/>
             </a:pPr>
             <a:endParaRPr lang="en-US" altLang="zh-CN" dirty="0"/>
           </a:p>
           <a:p>
             <a:pPr marL="171450" indent="-171450">
-              <a:buFont typeface="Arial" panose="020B0604020202020204" pitchFamily="34" charset="0"/>
+              <a:buFont typeface="Arial" panose="02080604020202020204" pitchFamily="34" charset="0"/>
               <a:buChar char="•"/>
             </a:pPr>
             <a:r>
@@ -826,7 +823,7 @@
           </a:p>
           <a:p>
             <a:pPr marL="628650" lvl="1" indent="-171450">
-              <a:buFont typeface="Arial" panose="020B0604020202020204" pitchFamily="34" charset="0"/>
+              <a:buFont typeface="Arial" panose="02080604020202020204" pitchFamily="34" charset="0"/>
               <a:buChar char="•"/>
             </a:pPr>
             <a:r>
@@ -837,13 +834,14 @@
           </a:p>
           <a:p>
             <a:pPr marL="628650" lvl="1" indent="-171450">
-              <a:buFont typeface="Arial" panose="020B0604020202020204" pitchFamily="34" charset="0"/>
+              <a:buFont typeface="Arial" panose="02080604020202020204" pitchFamily="34" charset="0"/>
               <a:buChar char="•"/>
             </a:pPr>
             <a:r>
               <a:rPr lang="zh-CN" altLang="en-US" dirty="0"/>
               <a:t>在之前还需要专门训练模型</a:t>
             </a:r>
+            <a:endParaRPr lang="zh-CN" altLang="en-US" dirty="0"/>
           </a:p>
         </p:txBody>
       </p:sp>
@@ -864,18 +862,12 @@
           <a:p>
             <a:fld id="{85D0DACE-38E0-42D2-9336-2B707D34BC6D}" type="slidenum">
               <a:rPr lang="zh-CN" altLang="en-US" smtClean="0"/>
-              <a:t>12</a:t>
             </a:fld>
             <a:endParaRPr lang="zh-CN" altLang="en-US"/>
           </a:p>
         </p:txBody>
       </p:sp>
     </p:spTree>
-    <p:extLst>
-      <p:ext uri="{BB962C8B-B14F-4D97-AF65-F5344CB8AC3E}">
-        <p14:creationId xmlns:p14="http://schemas.microsoft.com/office/powerpoint/2010/main" val="830529074"/>
-      </p:ext>
-    </p:extLst>
   </p:cSld>
   <p:clrMapOvr>
     <a:masterClrMapping/>
@@ -1044,23 +1036,25 @@
           <a:lstStyle/>
           <a:p>
             <a:pPr marL="171450" indent="-171450">
-              <a:buFont typeface="Arial" panose="020B0604020202020204" pitchFamily="34" charset="0"/>
+              <a:buFont typeface="Arial" panose="02080604020202020204" pitchFamily="34" charset="0"/>
               <a:buChar char="•"/>
             </a:pPr>
             <a:r>
               <a:rPr lang="zh-CN" altLang="en-US" dirty="0"/>
               <a:t>发动机是一直运转到人手动操作关闭</a:t>
             </a:r>
+            <a:endParaRPr lang="zh-CN" altLang="en-US" dirty="0"/>
           </a:p>
           <a:p>
             <a:pPr marL="171450" indent="-171450">
-              <a:buFont typeface="Arial" panose="020B0604020202020204" pitchFamily="34" charset="0"/>
+              <a:buFont typeface="Arial" panose="02080604020202020204" pitchFamily="34" charset="0"/>
               <a:buChar char="•"/>
             </a:pPr>
             <a:r>
               <a:rPr lang="zh-CN" altLang="en-US" dirty="0"/>
               <a:t>大模型是一直自动循环生成，直到它自己判断：意思表达清楚且完整了，自行停止</a:t>
             </a:r>
+            <a:endParaRPr lang="zh-CN" altLang="en-US" dirty="0"/>
           </a:p>
         </p:txBody>
       </p:sp>
@@ -1180,7 +1174,7 @@
           </a:p>
           <a:p>
             <a:pPr marL="171450" indent="-171450">
-              <a:buFont typeface="Arial" panose="020B0604020202020204" pitchFamily="34" charset="0"/>
+              <a:buFont typeface="Arial" panose="02080604020202020204" pitchFamily="34" charset="0"/>
               <a:buChar char="•"/>
             </a:pPr>
             <a:r>
@@ -1191,7 +1185,7 @@
           </a:p>
           <a:p>
             <a:pPr marL="171450" indent="-171450">
-              <a:buFont typeface="Arial" panose="020B0604020202020204" pitchFamily="34" charset="0"/>
+              <a:buFont typeface="Arial" panose="02080604020202020204" pitchFamily="34" charset="0"/>
               <a:buChar char="•"/>
             </a:pPr>
             <a:r>
@@ -1202,7 +1196,7 @@
           </a:p>
           <a:p>
             <a:pPr marL="171450" lvl="0" indent="-171450">
-              <a:buFont typeface="Arial" panose="020B0604020202020204" pitchFamily="34" charset="0"/>
+              <a:buFont typeface="Arial" panose="02080604020202020204" pitchFamily="34" charset="0"/>
               <a:buChar char="•"/>
             </a:pPr>
             <a:r>
@@ -1213,14 +1207,14 @@
           </a:p>
           <a:p>
             <a:pPr marL="628650" lvl="1" indent="-171450">
-              <a:buFont typeface="Arial" panose="020B0604020202020204" pitchFamily="34" charset="0"/>
+              <a:buFont typeface="Arial" panose="02080604020202020204" pitchFamily="34" charset="0"/>
               <a:buChar char="•"/>
             </a:pPr>
             <a:endParaRPr lang="en-US" altLang="zh-CN" dirty="0"/>
           </a:p>
           <a:p>
             <a:pPr marL="171450" indent="-171450">
-              <a:buFont typeface="Arial" panose="020B0604020202020204" pitchFamily="34" charset="0"/>
+              <a:buFont typeface="Arial" panose="02080604020202020204" pitchFamily="34" charset="0"/>
               <a:buChar char="•"/>
             </a:pPr>
             <a:r>
@@ -1231,7 +1225,7 @@
           </a:p>
           <a:p>
             <a:pPr marL="628650" lvl="1" indent="-171450">
-              <a:buFont typeface="Arial" panose="020B0604020202020204" pitchFamily="34" charset="0"/>
+              <a:buFont typeface="Arial" panose="02080604020202020204" pitchFamily="34" charset="0"/>
               <a:buChar char="•"/>
             </a:pPr>
             <a:r>
@@ -1242,7 +1236,7 @@
           </a:p>
           <a:p>
             <a:pPr marL="628650" lvl="1" indent="-171450">
-              <a:buFont typeface="Arial" panose="020B0604020202020204" pitchFamily="34" charset="0"/>
+              <a:buFont typeface="Arial" panose="02080604020202020204" pitchFamily="34" charset="0"/>
               <a:buChar char="•"/>
             </a:pPr>
             <a:r>
@@ -1253,14 +1247,14 @@
           </a:p>
           <a:p>
             <a:pPr marL="628650" lvl="1" indent="-171450">
-              <a:buFont typeface="Arial" panose="020B0604020202020204" pitchFamily="34" charset="0"/>
+              <a:buFont typeface="Arial" panose="02080604020202020204" pitchFamily="34" charset="0"/>
               <a:buChar char="•"/>
             </a:pPr>
             <a:endParaRPr lang="en-US" altLang="zh-CN" dirty="0"/>
           </a:p>
           <a:p>
             <a:pPr marL="171450" lvl="0" indent="-171450">
-              <a:buFont typeface="Arial" panose="020B0604020202020204" pitchFamily="34" charset="0"/>
+              <a:buFont typeface="Arial" panose="02080604020202020204" pitchFamily="34" charset="0"/>
               <a:buChar char="•"/>
             </a:pPr>
             <a:r>
@@ -1271,14 +1265,14 @@
           </a:p>
           <a:p>
             <a:pPr marL="171450" lvl="0" indent="-171450">
-              <a:buFont typeface="Arial" panose="020B0604020202020204" pitchFamily="34" charset="0"/>
+              <a:buFont typeface="Arial" panose="02080604020202020204" pitchFamily="34" charset="0"/>
               <a:buChar char="•"/>
             </a:pPr>
             <a:endParaRPr lang="en-US" altLang="zh-CN" dirty="0"/>
           </a:p>
           <a:p>
             <a:pPr marL="171450" lvl="0" indent="-171450">
-              <a:buFont typeface="Arial" panose="020B0604020202020204" pitchFamily="34" charset="0"/>
+              <a:buFont typeface="Arial" panose="02080604020202020204" pitchFamily="34" charset="0"/>
               <a:buChar char="•"/>
             </a:pPr>
             <a:r>
@@ -1309,18 +1303,12 @@
           <a:p>
             <a:fld id="{85D0DACE-38E0-42D2-9336-2B707D34BC6D}" type="slidenum">
               <a:rPr lang="zh-CN" altLang="en-US" smtClean="0"/>
-              <a:t>7</a:t>
             </a:fld>
             <a:endParaRPr lang="zh-CN" altLang="en-US"/>
           </a:p>
         </p:txBody>
       </p:sp>
     </p:spTree>
-    <p:extLst>
-      <p:ext uri="{BB962C8B-B14F-4D97-AF65-F5344CB8AC3E}">
-        <p14:creationId xmlns:p14="http://schemas.microsoft.com/office/powerpoint/2010/main" val="3927216450"/>
-      </p:ext>
-    </p:extLst>
   </p:cSld>
   <p:clrMapOvr>
     <a:masterClrMapping/>
@@ -1376,6 +1364,7 @@
               <a:rPr lang="zh-CN" altLang="en-US"/>
               <a:t>我们从数学上给它建一个模型</a:t>
             </a:r>
+            <a:endParaRPr lang="zh-CN" altLang="en-US"/>
           </a:p>
         </p:txBody>
       </p:sp>
@@ -1435,6 +1424,7 @@
               <a:rPr lang="zh-CN" altLang="en-US"/>
               <a:t>最最核心的就是“决策”，生成本身就是体现这种决策的表现</a:t>
             </a:r>
+            <a:endParaRPr lang="zh-CN" altLang="en-US"/>
           </a:p>
           <a:p>
             <a:pPr marL="171450" indent="-171450">
@@ -1445,6 +1435,7 @@
               <a:rPr lang="zh-CN" altLang="en-US"/>
               <a:t>以往用代码甚至用简单统计、一些小型的神经网络难以实现的判断</a:t>
             </a:r>
+            <a:endParaRPr lang="zh-CN" altLang="en-US"/>
           </a:p>
           <a:p>
             <a:pPr marL="628650" lvl="1" indent="-171450">
@@ -1512,7 +1503,7 @@
           <a:lstStyle/>
           <a:p>
             <a:pPr marL="171450" indent="-171450">
-              <a:buFont typeface="Arial" panose="020B0604020202020204" pitchFamily="34" charset="0"/>
+              <a:buFont typeface="Arial" panose="02080604020202020204" pitchFamily="34" charset="0"/>
               <a:buChar char="•"/>
             </a:pPr>
             <a:r>
@@ -1523,7 +1514,7 @@
           </a:p>
           <a:p>
             <a:pPr marL="628650" lvl="1" indent="-171450">
-              <a:buFont typeface="Arial" panose="020B0604020202020204" pitchFamily="34" charset="0"/>
+              <a:buFont typeface="Arial" panose="02080604020202020204" pitchFamily="34" charset="0"/>
               <a:buChar char="•"/>
             </a:pPr>
             <a:r>
@@ -1534,14 +1525,14 @@
           </a:p>
           <a:p>
             <a:pPr marL="628650" lvl="1" indent="-171450">
-              <a:buFont typeface="Arial" panose="020B0604020202020204" pitchFamily="34" charset="0"/>
+              <a:buFont typeface="Arial" panose="02080604020202020204" pitchFamily="34" charset="0"/>
               <a:buChar char="•"/>
             </a:pPr>
             <a:endParaRPr lang="en-US" altLang="zh-CN" dirty="0"/>
           </a:p>
           <a:p>
             <a:pPr marL="171450" lvl="0" indent="-171450">
-              <a:buFont typeface="Arial" panose="020B0604020202020204" pitchFamily="34" charset="0"/>
+              <a:buFont typeface="Arial" panose="02080604020202020204" pitchFamily="34" charset="0"/>
               <a:buChar char="•"/>
             </a:pPr>
             <a:r>
@@ -1552,14 +1543,14 @@
           </a:p>
           <a:p>
             <a:pPr marL="171450" lvl="0" indent="-171450">
-              <a:buFont typeface="Arial" panose="020B0604020202020204" pitchFamily="34" charset="0"/>
+              <a:buFont typeface="Arial" panose="02080604020202020204" pitchFamily="34" charset="0"/>
               <a:buChar char="•"/>
             </a:pPr>
             <a:endParaRPr lang="en-US" altLang="zh-CN" dirty="0"/>
           </a:p>
           <a:p>
             <a:pPr marL="171450" lvl="0" indent="-171450">
-              <a:buFont typeface="Arial" panose="020B0604020202020204" pitchFamily="34" charset="0"/>
+              <a:buFont typeface="Arial" panose="02080604020202020204" pitchFamily="34" charset="0"/>
               <a:buChar char="•"/>
             </a:pPr>
             <a:r>
@@ -1634,7 +1625,7 @@
           </a:p>
           <a:p>
             <a:pPr marL="628650" lvl="1" indent="-171450">
-              <a:buFont typeface="Arial" panose="020B0604020202020204" pitchFamily="34" charset="0"/>
+              <a:buFont typeface="Arial" panose="02080604020202020204" pitchFamily="34" charset="0"/>
               <a:buChar char="•"/>
             </a:pPr>
             <a:r>
@@ -1645,7 +1636,7 @@
           </a:p>
           <a:p>
             <a:pPr marL="628650" lvl="1" indent="-171450">
-              <a:buFont typeface="Arial" panose="020B0604020202020204" pitchFamily="34" charset="0"/>
+              <a:buFont typeface="Arial" panose="02080604020202020204" pitchFamily="34" charset="0"/>
               <a:buChar char="•"/>
             </a:pPr>
             <a:r>
@@ -1748,6 +1739,7 @@
               <a:rPr lang="zh-CN" altLang="en-US"/>
               <a:t>这个问题连顶尖专家都还在吵。我们这节课不下结论</a:t>
             </a:r>
+            <a:endParaRPr lang="zh-CN" altLang="en-US"/>
           </a:p>
           <a:p>
             <a:pPr marL="171450" indent="-171450">
@@ -1758,6 +1750,7 @@
               <a:rPr lang="zh-CN" altLang="en-US"/>
               <a:t>既不神化它（「它觉醒了」），也不矮化它（「它只会背书」）</a:t>
             </a:r>
+            <a:endParaRPr lang="zh-CN" altLang="en-US"/>
           </a:p>
           <a:p>
             <a:pPr marL="171450" indent="-171450">
@@ -1768,6 +1761,7 @@
               <a:rPr lang="zh-CN" altLang="en-US"/>
               <a:t>面对一个未决的科学问题，诚实地悬置判断，本身就是一种能力。</a:t>
             </a:r>
+            <a:endParaRPr lang="zh-CN" altLang="en-US"/>
           </a:p>
         </p:txBody>
       </p:sp>
@@ -1841,7 +1835,6 @@
             <a:pPr algn="ctr">
               <a:defRPr/>
             </a:pPr>
-            <a:endParaRPr/>
           </a:p>
         </p:txBody>
       </p:sp>
@@ -1917,7 +1910,6 @@
             <a:pPr algn="ctr">
               <a:defRPr/>
             </a:pPr>
-            <a:endParaRPr/>
           </a:p>
         </p:txBody>
       </p:sp>
@@ -1993,7 +1985,6 @@
             <a:pPr algn="ctr">
               <a:defRPr/>
             </a:pPr>
-            <a:endParaRPr/>
           </a:p>
         </p:txBody>
       </p:sp>
@@ -2069,7 +2060,6 @@
             <a:pPr algn="ctr">
               <a:defRPr/>
             </a:pPr>
-            <a:endParaRPr/>
           </a:p>
         </p:txBody>
       </p:sp>
@@ -2141,7 +2131,6 @@
             <a:pPr algn="ctr">
               <a:defRPr/>
             </a:pPr>
-            <a:endParaRPr/>
           </a:p>
         </p:txBody>
       </p:sp>
@@ -2213,7 +2202,6 @@
             <a:pPr algn="ctr">
               <a:defRPr/>
             </a:pPr>
-            <a:endParaRPr/>
           </a:p>
         </p:txBody>
       </p:sp>
@@ -2295,7 +2283,6 @@
             <a:pPr algn="ctr">
               <a:defRPr/>
             </a:pPr>
-            <a:endParaRPr/>
           </a:p>
         </p:txBody>
       </p:sp>
@@ -2376,6 +2363,7 @@
               <a:rPr lang="zh-CN" altLang="en-US" dirty="0"/>
               <a:t>单击此处添加标题</a:t>
             </a:r>
+            <a:endParaRPr lang="zh-CN" altLang="en-US" dirty="0"/>
           </a:p>
         </p:txBody>
       </p:sp>
@@ -2396,7 +2384,6 @@
           <a:p>
             <a:fld id="{760FBDFE-C587-4B4C-A407-44438C67B59E}" type="datetimeFigureOut">
               <a:rPr lang="zh-CN" altLang="en-US" smtClean="0"/>
-              <a:t>2026/9/6</a:t>
             </a:fld>
             <a:endParaRPr lang="zh-CN" altLang="en-US"/>
           </a:p>
@@ -2438,7 +2425,6 @@
           <a:p>
             <a:fld id="{49AE70B2-8BF9-45C0-BB95-33D1B9D3A854}" type="slidenum">
               <a:rPr lang="zh-CN" altLang="en-US" smtClean="0"/>
-              <a:t>‹#›</a:t>
             </a:fld>
             <a:endParaRPr lang="zh-CN" altLang="en-US"/>
           </a:p>
@@ -2516,6 +2502,7 @@
               <a:rPr lang="zh-CN" altLang="en-US" dirty="0"/>
               <a:t>单击此处添加副标题</a:t>
             </a:r>
+            <a:endParaRPr lang="zh-CN" altLang="en-US" dirty="0"/>
           </a:p>
         </p:txBody>
       </p:sp>
@@ -2607,6 +2594,7 @@
               <a:rPr lang="zh-CN" altLang="en-US"/>
               <a:t>【日期】</a:t>
             </a:r>
+            <a:endParaRPr lang="zh-CN" altLang="en-US"/>
           </a:p>
           <a:p>
             <a:pPr lvl="0"/>
@@ -2657,7 +2645,6 @@
           <a:p>
             <a:fld id="{760FBDFE-C587-4B4C-A407-44438C67B59E}" type="datetimeFigureOut">
               <a:rPr lang="zh-CN" altLang="en-US" smtClean="0"/>
-              <a:t>2026/9/6</a:t>
             </a:fld>
             <a:endParaRPr lang="zh-CN" altLang="en-US"/>
           </a:p>
@@ -2699,7 +2686,6 @@
           <a:p>
             <a:fld id="{49AE70B2-8BF9-45C0-BB95-33D1B9D3A854}" type="slidenum">
               <a:rPr lang="zh-CN" altLang="en-US" smtClean="0"/>
-              <a:t>‹#›</a:t>
             </a:fld>
             <a:endParaRPr lang="zh-CN" altLang="en-US"/>
           </a:p>
@@ -2769,6 +2755,7 @@
               <a:rPr lang="zh-CN" altLang="en-US" dirty="0"/>
               <a:t>单击此处编辑标题</a:t>
             </a:r>
+            <a:endParaRPr lang="zh-CN" altLang="en-US" dirty="0"/>
           </a:p>
         </p:txBody>
       </p:sp>
@@ -2900,6 +2887,7 @@
               <a:rPr lang="zh-CN" altLang="en-US" dirty="0"/>
               <a:t>单击此处编辑母版文本样式</a:t>
             </a:r>
+            <a:endParaRPr lang="zh-CN" altLang="en-US" dirty="0"/>
           </a:p>
         </p:txBody>
       </p:sp>
@@ -2920,7 +2908,6 @@
           <a:p>
             <a:fld id="{9EFD9D74-47D9-4702-A33C-335B63B48DBF}" type="datetimeFigureOut">
               <a:rPr lang="zh-CN" altLang="en-US" smtClean="0"/>
-              <a:t>2026/9/6</a:t>
             </a:fld>
             <a:endParaRPr lang="zh-CN" altLang="en-US" dirty="0"/>
           </a:p>
@@ -2962,7 +2949,6 @@
           <a:p>
             <a:fld id="{FABC47A4-756D-490B-A52F-7D9E2C9FC05F}" type="slidenum">
               <a:rPr lang="zh-CN" altLang="en-US" smtClean="0"/>
-              <a:t>‹#›</a:t>
             </a:fld>
             <a:endParaRPr lang="zh-CN" altLang="en-US"/>
           </a:p>
@@ -3024,6 +3010,7 @@
               <a:rPr lang="zh-CN" altLang="en-US"/>
               <a:t>单击此处编辑母版标题样式</a:t>
             </a:r>
+            <a:endParaRPr lang="zh-CN" altLang="en-US"/>
           </a:p>
         </p:txBody>
       </p:sp>
@@ -3052,6 +3039,7 @@
               <a:rPr lang="zh-CN" altLang="en-US" dirty="0"/>
               <a:t>单击此处编辑母版文本样式</a:t>
             </a:r>
+            <a:endParaRPr lang="zh-CN" altLang="en-US" dirty="0"/>
           </a:p>
           <a:p>
             <a:pPr lvl="1"/>
@@ -3059,6 +3047,7 @@
               <a:rPr lang="zh-CN" altLang="en-US" dirty="0"/>
               <a:t>第二级</a:t>
             </a:r>
+            <a:endParaRPr lang="zh-CN" altLang="en-US" dirty="0"/>
           </a:p>
           <a:p>
             <a:pPr lvl="2"/>
@@ -3066,6 +3055,7 @@
               <a:rPr lang="zh-CN" altLang="en-US" dirty="0"/>
               <a:t>第三级</a:t>
             </a:r>
+            <a:endParaRPr lang="zh-CN" altLang="en-US" dirty="0"/>
           </a:p>
           <a:p>
             <a:pPr lvl="3"/>
@@ -3073,6 +3063,7 @@
               <a:rPr lang="zh-CN" altLang="en-US" dirty="0"/>
               <a:t>第四级</a:t>
             </a:r>
+            <a:endParaRPr lang="zh-CN" altLang="en-US" dirty="0"/>
           </a:p>
           <a:p>
             <a:pPr lvl="4"/>
@@ -3080,6 +3071,7 @@
               <a:rPr lang="zh-CN" altLang="en-US" dirty="0"/>
               <a:t>第五级</a:t>
             </a:r>
+            <a:endParaRPr lang="zh-CN" altLang="en-US" dirty="0"/>
           </a:p>
         </p:txBody>
       </p:sp>
@@ -3100,7 +3092,6 @@
           <a:p>
             <a:fld id="{760FBDFE-C587-4B4C-A407-44438C67B59E}" type="datetimeFigureOut">
               <a:rPr lang="zh-CN" altLang="en-US" smtClean="0"/>
-              <a:t>2026/9/6</a:t>
             </a:fld>
             <a:endParaRPr lang="zh-CN" altLang="en-US"/>
           </a:p>
@@ -3142,7 +3133,6 @@
           <a:p>
             <a:fld id="{49AE70B2-8BF9-45C0-BB95-33D1B9D3A854}" type="slidenum">
               <a:rPr lang="zh-CN" altLang="en-US" smtClean="0"/>
-              <a:t>‹#›</a:t>
             </a:fld>
             <a:endParaRPr lang="zh-CN" altLang="en-US"/>
           </a:p>
@@ -3191,7 +3181,6 @@
           <a:p>
             <a:fld id="{760FBDFE-C587-4B4C-A407-44438C67B59E}" type="datetimeFigureOut">
               <a:rPr lang="zh-CN" altLang="en-US" smtClean="0"/>
-              <a:t>2026/9/6</a:t>
             </a:fld>
             <a:endParaRPr lang="zh-CN" altLang="en-US"/>
           </a:p>
@@ -3233,7 +3222,6 @@
           <a:p>
             <a:fld id="{49AE70B2-8BF9-45C0-BB95-33D1B9D3A854}" type="slidenum">
               <a:rPr lang="zh-CN" altLang="en-US" smtClean="0"/>
-              <a:t>‹#›</a:t>
             </a:fld>
             <a:endParaRPr lang="zh-CN" altLang="en-US"/>
           </a:p>
@@ -3264,6 +3252,7 @@
               <a:rPr lang="zh-CN" altLang="en-US" dirty="0"/>
               <a:t>单击此处编辑母版文本样式</a:t>
             </a:r>
+            <a:endParaRPr lang="zh-CN" altLang="en-US" dirty="0"/>
           </a:p>
           <a:p>
             <a:pPr lvl="1"/>
@@ -3271,6 +3260,7 @@
               <a:rPr lang="zh-CN" altLang="en-US" dirty="0"/>
               <a:t>第二级</a:t>
             </a:r>
+            <a:endParaRPr lang="zh-CN" altLang="en-US" dirty="0"/>
           </a:p>
           <a:p>
             <a:pPr lvl="2"/>
@@ -3278,6 +3268,7 @@
               <a:rPr lang="zh-CN" altLang="en-US" dirty="0"/>
               <a:t>第三级</a:t>
             </a:r>
+            <a:endParaRPr lang="zh-CN" altLang="en-US" dirty="0"/>
           </a:p>
           <a:p>
             <a:pPr lvl="3"/>
@@ -3285,6 +3276,7 @@
               <a:rPr lang="zh-CN" altLang="en-US" dirty="0"/>
               <a:t>第四级</a:t>
             </a:r>
+            <a:endParaRPr lang="zh-CN" altLang="en-US" dirty="0"/>
           </a:p>
           <a:p>
             <a:pPr lvl="4"/>
@@ -3292,6 +3284,7 @@
               <a:rPr lang="zh-CN" altLang="en-US" dirty="0"/>
               <a:t>第五级</a:t>
             </a:r>
+            <a:endParaRPr lang="zh-CN" altLang="en-US" dirty="0"/>
           </a:p>
         </p:txBody>
       </p:sp>
@@ -3393,7 +3386,6 @@
             <a:pPr algn="ctr">
               <a:defRPr/>
             </a:pPr>
-            <a:endParaRPr/>
           </a:p>
         </p:txBody>
       </p:sp>
@@ -3469,7 +3461,6 @@
             <a:pPr algn="ctr">
               <a:defRPr/>
             </a:pPr>
-            <a:endParaRPr/>
           </a:p>
         </p:txBody>
       </p:sp>
@@ -3490,7 +3481,6 @@
           <a:p>
             <a:fld id="{760FBDFE-C587-4B4C-A407-44438C67B59E}" type="datetimeFigureOut">
               <a:rPr lang="zh-CN" altLang="en-US" smtClean="0"/>
-              <a:t>2026/9/6</a:t>
             </a:fld>
             <a:endParaRPr lang="zh-CN" altLang="en-US"/>
           </a:p>
@@ -3532,7 +3522,6 @@
           <a:p>
             <a:fld id="{49AE70B2-8BF9-45C0-BB95-33D1B9D3A854}" type="slidenum">
               <a:rPr lang="zh-CN" altLang="en-US" smtClean="0"/>
-              <a:t>‹#›</a:t>
             </a:fld>
             <a:endParaRPr lang="zh-CN" altLang="en-US"/>
           </a:p>
@@ -3675,13 +3664,13 @@
           <p:nvPr userDrawn="1"/>
         </p:nvPicPr>
         <p:blipFill>
-          <a:blip>
+          <a:blip r:embed="rId2">
             <a:extLst>
               <a:ext uri="{28A0092B-C50C-407E-A947-70E740481C1C}">
                 <a14:useLocalDpi xmlns:a14="http://schemas.microsoft.com/office/drawing/2010/main" val="0"/>
               </a:ext>
               <a:ext uri="{96DAC541-7B7A-43D3-8B79-37D633B846F1}">
-                <asvg:svgBlip xmlns:asvg="http://schemas.microsoft.com/office/drawing/2016/SVG/main" r:embed="rId2"/>
+                <asvg:svgBlip xmlns:asvg="http://schemas.microsoft.com/office/drawing/2016/SVG/main" r:embed="rId3"/>
               </a:ext>
             </a:extLst>
           </a:blip>
@@ -3740,13 +3729,13 @@
           <p:nvPr userDrawn="1"/>
         </p:nvPicPr>
         <p:blipFill>
-          <a:blip>
+          <a:blip r:embed="rId4">
             <a:extLst>
               <a:ext uri="{28A0092B-C50C-407E-A947-70E740481C1C}">
                 <a14:useLocalDpi xmlns:a14="http://schemas.microsoft.com/office/drawing/2010/main" val="0"/>
               </a:ext>
               <a:ext uri="{96DAC541-7B7A-43D3-8B79-37D633B846F1}">
-                <asvg:svgBlip xmlns:asvg="http://schemas.microsoft.com/office/drawing/2016/SVG/main" r:embed="rId3"/>
+                <asvg:svgBlip xmlns:asvg="http://schemas.microsoft.com/office/drawing/2016/SVG/main" r:embed="rId5"/>
               </a:ext>
             </a:extLst>
           </a:blip>
@@ -3805,13 +3794,13 @@
           <p:nvPr userDrawn="1"/>
         </p:nvPicPr>
         <p:blipFill>
-          <a:blip>
+          <a:blip r:embed="rId6">
             <a:extLst>
               <a:ext uri="{28A0092B-C50C-407E-A947-70E740481C1C}">
                 <a14:useLocalDpi xmlns:a14="http://schemas.microsoft.com/office/drawing/2010/main" val="0"/>
               </a:ext>
               <a:ext uri="{96DAC541-7B7A-43D3-8B79-37D633B846F1}">
-                <asvg:svgBlip xmlns:asvg="http://schemas.microsoft.com/office/drawing/2016/SVG/main" r:embed="rId4"/>
+                <asvg:svgBlip xmlns:asvg="http://schemas.microsoft.com/office/drawing/2016/SVG/main" r:embed="rId7"/>
               </a:ext>
             </a:extLst>
           </a:blip>
@@ -3929,6 +3918,7 @@
               <a:rPr altLang="zh-CN"/>
               <a:t>XXX</a:t>
             </a:r>
+            <a:endParaRPr altLang="zh-CN"/>
           </a:p>
         </p:txBody>
       </p:sp>
@@ -3985,6 +3975,7 @@
               <a:rPr lang="zh-CN" altLang="en-US"/>
               <a:t>事实</a:t>
             </a:r>
+            <a:endParaRPr lang="zh-CN" altLang="en-US"/>
           </a:p>
         </p:txBody>
       </p:sp>
@@ -4109,7 +4100,6 @@
             <a:pPr algn="ctr">
               <a:defRPr/>
             </a:pPr>
-            <a:endParaRPr/>
           </a:p>
         </p:txBody>
       </p:sp>
@@ -4158,7 +4148,6 @@
             <a:pPr algn="ctr">
               <a:defRPr/>
             </a:pPr>
-            <a:endParaRPr/>
           </a:p>
         </p:txBody>
       </p:sp>
@@ -4207,6 +4196,7 @@
               <a:rPr lang="zh-CN" altLang="en-US" dirty="0"/>
               <a:t>单击此处编辑母版标题样式</a:t>
             </a:r>
+            <a:endParaRPr lang="zh-CN" altLang="en-US" dirty="0"/>
           </a:p>
         </p:txBody>
       </p:sp>
@@ -4303,6 +4293,7 @@
               <a:rPr lang="zh-CN" altLang="en-US" dirty="0"/>
               <a:t>单击此处编辑母版文本样式</a:t>
             </a:r>
+            <a:endParaRPr lang="zh-CN" altLang="en-US" dirty="0"/>
           </a:p>
           <a:p>
             <a:pPr lvl="1"/>
@@ -4310,6 +4301,7 @@
               <a:rPr lang="zh-CN" altLang="en-US" dirty="0"/>
               <a:t>第二级</a:t>
             </a:r>
+            <a:endParaRPr lang="zh-CN" altLang="en-US" dirty="0"/>
           </a:p>
           <a:p>
             <a:pPr lvl="2"/>
@@ -4317,6 +4309,7 @@
               <a:rPr lang="zh-CN" altLang="en-US" dirty="0"/>
               <a:t>第三级</a:t>
             </a:r>
+            <a:endParaRPr lang="zh-CN" altLang="en-US" dirty="0"/>
           </a:p>
           <a:p>
             <a:pPr lvl="3"/>
@@ -4324,6 +4317,7 @@
               <a:rPr lang="zh-CN" altLang="en-US" dirty="0"/>
               <a:t>第四级</a:t>
             </a:r>
+            <a:endParaRPr lang="zh-CN" altLang="en-US" dirty="0"/>
           </a:p>
           <a:p>
             <a:pPr lvl="4"/>
@@ -4331,6 +4325,7 @@
               <a:rPr lang="zh-CN" altLang="en-US" dirty="0"/>
               <a:t>第五级</a:t>
             </a:r>
+            <a:endParaRPr lang="zh-CN" altLang="en-US" dirty="0"/>
           </a:p>
         </p:txBody>
       </p:sp>
@@ -4360,7 +4355,6 @@
           <a:p>
             <a:fld id="{760FBDFE-C587-4B4C-A407-44438C67B59E}" type="datetimeFigureOut">
               <a:rPr lang="zh-CN" altLang="en-US" smtClean="0"/>
-              <a:t>2026/9/6</a:t>
             </a:fld>
             <a:endParaRPr lang="zh-CN" altLang="en-US"/>
           </a:p>
@@ -4416,7 +4410,6 @@
           <a:p>
             <a:fld id="{49AE70B2-8BF9-45C0-BB95-33D1B9D3A854}" type="slidenum">
               <a:rPr lang="zh-CN" altLang="en-US" smtClean="0"/>
-              <a:t>‹#›</a:t>
             </a:fld>
             <a:endParaRPr lang="en-US" altLang="zh-CN"/>
           </a:p>
@@ -4456,7 +4449,6 @@
             <a:pPr algn="ctr">
               <a:defRPr/>
             </a:pPr>
-            <a:endParaRPr/>
           </a:p>
         </p:txBody>
       </p:sp>
@@ -4563,7 +4555,6 @@
             <a:pPr algn="ctr">
               <a:defRPr/>
             </a:pPr>
-            <a:endParaRPr/>
           </a:p>
         </p:txBody>
       </p:sp>
@@ -4612,7 +4603,6 @@
             <a:pPr algn="ctr">
               <a:defRPr/>
             </a:pPr>
-            <a:endParaRPr/>
           </a:p>
         </p:txBody>
       </p:sp>
@@ -4661,6 +4651,7 @@
               <a:rPr lang="zh-CN" altLang="en-US" dirty="0"/>
               <a:t>单击此处编辑母版标题样式</a:t>
             </a:r>
+            <a:endParaRPr lang="zh-CN" altLang="en-US" dirty="0"/>
           </a:p>
         </p:txBody>
       </p:sp>
@@ -4757,6 +4748,7 @@
               <a:rPr lang="zh-CN" altLang="en-US" dirty="0"/>
               <a:t>单击此处编辑母版文本样式</a:t>
             </a:r>
+            <a:endParaRPr lang="zh-CN" altLang="en-US" dirty="0"/>
           </a:p>
           <a:p>
             <a:pPr lvl="1"/>
@@ -4764,6 +4756,7 @@
               <a:rPr lang="zh-CN" altLang="en-US" dirty="0"/>
               <a:t>第二级</a:t>
             </a:r>
+            <a:endParaRPr lang="zh-CN" altLang="en-US" dirty="0"/>
           </a:p>
           <a:p>
             <a:pPr lvl="2"/>
@@ -4771,6 +4764,7 @@
               <a:rPr lang="zh-CN" altLang="en-US" dirty="0"/>
               <a:t>第三级</a:t>
             </a:r>
+            <a:endParaRPr lang="zh-CN" altLang="en-US" dirty="0"/>
           </a:p>
           <a:p>
             <a:pPr lvl="3"/>
@@ -4778,6 +4772,7 @@
               <a:rPr lang="zh-CN" altLang="en-US" dirty="0"/>
               <a:t>第四级</a:t>
             </a:r>
+            <a:endParaRPr lang="zh-CN" altLang="en-US" dirty="0"/>
           </a:p>
           <a:p>
             <a:pPr lvl="4"/>
@@ -4785,6 +4780,7 @@
               <a:rPr lang="zh-CN" altLang="en-US" dirty="0"/>
               <a:t>第五级</a:t>
             </a:r>
+            <a:endParaRPr lang="zh-CN" altLang="en-US" dirty="0"/>
           </a:p>
         </p:txBody>
       </p:sp>
@@ -4814,7 +4810,6 @@
           <a:p>
             <a:fld id="{760FBDFE-C587-4B4C-A407-44438C67B59E}" type="datetimeFigureOut">
               <a:rPr lang="zh-CN" altLang="en-US" smtClean="0"/>
-              <a:t>2026/9/6</a:t>
             </a:fld>
             <a:endParaRPr lang="zh-CN" altLang="en-US"/>
           </a:p>
@@ -4870,7 +4865,6 @@
           <a:p>
             <a:fld id="{49AE70B2-8BF9-45C0-BB95-33D1B9D3A854}" type="slidenum">
               <a:rPr lang="zh-CN" altLang="en-US" smtClean="0"/>
-              <a:t>‹#›</a:t>
             </a:fld>
             <a:endParaRPr lang="en-US" altLang="zh-CN"/>
           </a:p>
@@ -4910,7 +4904,6 @@
             <a:pPr algn="ctr">
               <a:defRPr/>
             </a:pPr>
-            <a:endParaRPr/>
           </a:p>
         </p:txBody>
       </p:sp>
@@ -4989,7 +4982,6 @@
             <a:pPr algn="ctr">
               <a:defRPr/>
             </a:pPr>
-            <a:endParaRPr/>
           </a:p>
         </p:txBody>
       </p:sp>
@@ -5023,6 +5015,7 @@
               <a:rPr lang="zh-CN" altLang="en-US"/>
               <a:t>插入定义文本</a:t>
             </a:r>
+            <a:endParaRPr lang="zh-CN" altLang="en-US"/>
           </a:p>
         </p:txBody>
       </p:sp>
@@ -5114,7 +5107,6 @@
             <a:pPr algn="ctr">
               <a:defRPr/>
             </a:pPr>
-            <a:endParaRPr/>
           </a:p>
         </p:txBody>
       </p:sp>
@@ -5180,7 +5172,6 @@
             <a:pPr algn="ctr">
               <a:defRPr/>
             </a:pPr>
-            <a:endParaRPr/>
           </a:p>
         </p:txBody>
       </p:sp>
@@ -5229,6 +5220,7 @@
               <a:rPr lang="zh-CN" altLang="en-US" dirty="0"/>
               <a:t>【思考与讨论】</a:t>
             </a:r>
+            <a:endParaRPr lang="zh-CN" altLang="en-US" dirty="0"/>
           </a:p>
         </p:txBody>
       </p:sp>
@@ -5330,6 +5322,7 @@
               <a:rPr lang="zh-CN" altLang="en-US" dirty="0"/>
               <a:t>【提出一个开放性问题,引导学生思考】</a:t>
             </a:r>
+            <a:endParaRPr lang="zh-CN" altLang="en-US" dirty="0"/>
           </a:p>
         </p:txBody>
       </p:sp>
@@ -5359,7 +5352,6 @@
           <a:p>
             <a:fld id="{760FBDFE-C587-4B4C-A407-44438C67B59E}" type="datetimeFigureOut">
               <a:rPr lang="zh-CN" altLang="en-US" smtClean="0"/>
-              <a:t>2026/9/6</a:t>
             </a:fld>
             <a:endParaRPr lang="zh-CN" altLang="en-US"/>
           </a:p>
@@ -5415,7 +5407,6 @@
           <a:p>
             <a:fld id="{49AE70B2-8BF9-45C0-BB95-33D1B9D3A854}" type="slidenum">
               <a:rPr lang="zh-CN" altLang="en-US" smtClean="0"/>
-              <a:t>‹#›</a:t>
             </a:fld>
             <a:endParaRPr lang="en-US" altLang="zh-CN"/>
           </a:p>
@@ -5531,7 +5522,6 @@
             <a:pPr algn="ctr">
               <a:defRPr/>
             </a:pPr>
-            <a:endParaRPr/>
           </a:p>
         </p:txBody>
       </p:sp>
@@ -5689,6 +5679,7 @@
               <a:rPr lang="zh-CN" altLang="en-US" dirty="0"/>
               <a:t>【提示:可以分组讨论 / 举手回答 / 课后思考】</a:t>
             </a:r>
+            <a:endParaRPr lang="zh-CN" altLang="en-US" dirty="0"/>
           </a:p>
         </p:txBody>
       </p:sp>
@@ -5756,6 +5747,7 @@
               <a:rPr lang="zh-CN" altLang="en-US" dirty="0"/>
               <a:t>单击此处编辑母版标题样式</a:t>
             </a:r>
+            <a:endParaRPr lang="zh-CN" altLang="en-US" dirty="0"/>
           </a:p>
         </p:txBody>
       </p:sp>
@@ -5875,6 +5867,7 @@
               <a:rPr lang="zh-CN" altLang="en-US" dirty="0"/>
               <a:t>单击此处编辑母版文本样式</a:t>
             </a:r>
+            <a:endParaRPr lang="zh-CN" altLang="en-US" dirty="0"/>
           </a:p>
         </p:txBody>
       </p:sp>
@@ -5895,7 +5888,6 @@
           <a:p>
             <a:fld id="{760FBDFE-C587-4B4C-A407-44438C67B59E}" type="datetimeFigureOut">
               <a:rPr lang="zh-CN" altLang="en-US" smtClean="0"/>
-              <a:t>2026/9/6</a:t>
             </a:fld>
             <a:endParaRPr lang="zh-CN" altLang="en-US"/>
           </a:p>
@@ -5937,7 +5929,6 @@
           <a:p>
             <a:fld id="{49AE70B2-8BF9-45C0-BB95-33D1B9D3A854}" type="slidenum">
               <a:rPr lang="zh-CN" altLang="en-US" smtClean="0"/>
-              <a:t>‹#›</a:t>
             </a:fld>
             <a:endParaRPr lang="zh-CN" altLang="en-US"/>
           </a:p>
@@ -6007,6 +5998,7 @@
               <a:rPr lang="zh-CN" altLang="en-US" dirty="0"/>
               <a:t>单击此处编辑母版标题样式</a:t>
             </a:r>
+            <a:endParaRPr lang="zh-CN" altLang="en-US" dirty="0"/>
           </a:p>
         </p:txBody>
       </p:sp>
@@ -6103,6 +6095,7 @@
               <a:rPr lang="zh-CN" altLang="en-US" dirty="0"/>
               <a:t>单击此处编辑母版文本样式</a:t>
             </a:r>
+            <a:endParaRPr lang="zh-CN" altLang="en-US" dirty="0"/>
           </a:p>
           <a:p>
             <a:pPr lvl="1"/>
@@ -6110,6 +6103,7 @@
               <a:rPr lang="zh-CN" altLang="en-US" dirty="0"/>
               <a:t>第二级</a:t>
             </a:r>
+            <a:endParaRPr lang="zh-CN" altLang="en-US" dirty="0"/>
           </a:p>
           <a:p>
             <a:pPr lvl="2"/>
@@ -6117,6 +6111,7 @@
               <a:rPr lang="zh-CN" altLang="en-US" dirty="0"/>
               <a:t>第三级</a:t>
             </a:r>
+            <a:endParaRPr lang="zh-CN" altLang="en-US" dirty="0"/>
           </a:p>
           <a:p>
             <a:pPr lvl="3"/>
@@ -6124,6 +6119,7 @@
               <a:rPr lang="zh-CN" altLang="en-US" dirty="0"/>
               <a:t>第四级</a:t>
             </a:r>
+            <a:endParaRPr lang="zh-CN" altLang="en-US" dirty="0"/>
           </a:p>
           <a:p>
             <a:pPr lvl="4"/>
@@ -6131,6 +6127,7 @@
               <a:rPr lang="zh-CN" altLang="en-US" dirty="0"/>
               <a:t>第五级</a:t>
             </a:r>
+            <a:endParaRPr lang="zh-CN" altLang="en-US" dirty="0"/>
           </a:p>
         </p:txBody>
       </p:sp>
@@ -6227,6 +6224,7 @@
               <a:rPr lang="zh-CN" altLang="en-US" dirty="0"/>
               <a:t>单击此处编辑母版文本样式</a:t>
             </a:r>
+            <a:endParaRPr lang="zh-CN" altLang="en-US" dirty="0"/>
           </a:p>
           <a:p>
             <a:pPr lvl="1"/>
@@ -6234,6 +6232,7 @@
               <a:rPr lang="zh-CN" altLang="en-US" dirty="0"/>
               <a:t>第二级</a:t>
             </a:r>
+            <a:endParaRPr lang="zh-CN" altLang="en-US" dirty="0"/>
           </a:p>
           <a:p>
             <a:pPr lvl="2"/>
@@ -6241,6 +6240,7 @@
               <a:rPr lang="zh-CN" altLang="en-US" dirty="0"/>
               <a:t>第三级</a:t>
             </a:r>
+            <a:endParaRPr lang="zh-CN" altLang="en-US" dirty="0"/>
           </a:p>
           <a:p>
             <a:pPr lvl="3"/>
@@ -6248,6 +6248,7 @@
               <a:rPr lang="zh-CN" altLang="en-US" dirty="0"/>
               <a:t>第四级</a:t>
             </a:r>
+            <a:endParaRPr lang="zh-CN" altLang="en-US" dirty="0"/>
           </a:p>
           <a:p>
             <a:pPr lvl="4"/>
@@ -6255,6 +6256,7 @@
               <a:rPr lang="zh-CN" altLang="en-US" dirty="0"/>
               <a:t>第五级</a:t>
             </a:r>
+            <a:endParaRPr lang="zh-CN" altLang="en-US" dirty="0"/>
           </a:p>
         </p:txBody>
       </p:sp>
@@ -6275,7 +6277,6 @@
           <a:p>
             <a:fld id="{760FBDFE-C587-4B4C-A407-44438C67B59E}" type="datetimeFigureOut">
               <a:rPr lang="zh-CN" altLang="en-US" smtClean="0"/>
-              <a:t>2026/9/6</a:t>
             </a:fld>
             <a:endParaRPr lang="zh-CN" altLang="en-US"/>
           </a:p>
@@ -6317,7 +6318,6 @@
           <a:p>
             <a:fld id="{49AE70B2-8BF9-45C0-BB95-33D1B9D3A854}" type="slidenum">
               <a:rPr lang="zh-CN" altLang="en-US" smtClean="0"/>
-              <a:t>‹#›</a:t>
             </a:fld>
             <a:endParaRPr lang="zh-CN" altLang="en-US"/>
           </a:p>
@@ -6401,6 +6401,7 @@
               <a:rPr lang="zh-CN" altLang="en-US"/>
               <a:t>单击此处编辑母版标题样式</a:t>
             </a:r>
+            <a:endParaRPr lang="zh-CN" altLang="en-US"/>
           </a:p>
         </p:txBody>
       </p:sp>
@@ -6474,6 +6475,7 @@
               <a:rPr lang="zh-CN" altLang="en-US" dirty="0"/>
               <a:t>单击此处编辑母版文本样式</a:t>
             </a:r>
+            <a:endParaRPr lang="zh-CN" altLang="en-US" dirty="0"/>
           </a:p>
         </p:txBody>
       </p:sp>
@@ -6548,6 +6550,7 @@
               <a:rPr lang="zh-CN" altLang="en-US" dirty="0"/>
               <a:t>单击此处编辑母版文本样式</a:t>
             </a:r>
+            <a:endParaRPr lang="zh-CN" altLang="en-US" dirty="0"/>
           </a:p>
           <a:p>
             <a:pPr lvl="1"/>
@@ -6555,6 +6558,7 @@
               <a:rPr lang="zh-CN" altLang="en-US" dirty="0"/>
               <a:t>第二级</a:t>
             </a:r>
+            <a:endParaRPr lang="zh-CN" altLang="en-US" dirty="0"/>
           </a:p>
           <a:p>
             <a:pPr lvl="2"/>
@@ -6562,6 +6566,7 @@
               <a:rPr lang="zh-CN" altLang="en-US" dirty="0"/>
               <a:t>第三级</a:t>
             </a:r>
+            <a:endParaRPr lang="zh-CN" altLang="en-US" dirty="0"/>
           </a:p>
           <a:p>
             <a:pPr lvl="3"/>
@@ -6569,6 +6574,7 @@
               <a:rPr lang="zh-CN" altLang="en-US" dirty="0"/>
               <a:t>第四级</a:t>
             </a:r>
+            <a:endParaRPr lang="zh-CN" altLang="en-US" dirty="0"/>
           </a:p>
           <a:p>
             <a:pPr lvl="4"/>
@@ -6576,6 +6582,7 @@
               <a:rPr lang="zh-CN" altLang="en-US" dirty="0"/>
               <a:t>第五级</a:t>
             </a:r>
+            <a:endParaRPr lang="zh-CN" altLang="en-US" dirty="0"/>
           </a:p>
         </p:txBody>
       </p:sp>
@@ -6649,6 +6656,7 @@
               <a:rPr lang="zh-CN" altLang="en-US" dirty="0"/>
               <a:t>单击此处编辑母版文本样式</a:t>
             </a:r>
+            <a:endParaRPr lang="zh-CN" altLang="en-US" dirty="0"/>
           </a:p>
         </p:txBody>
       </p:sp>
@@ -6723,6 +6731,7 @@
               <a:rPr lang="zh-CN" altLang="en-US" dirty="0"/>
               <a:t>单击此处编辑母版文本样式</a:t>
             </a:r>
+            <a:endParaRPr lang="zh-CN" altLang="en-US" dirty="0"/>
           </a:p>
           <a:p>
             <a:pPr lvl="1"/>
@@ -6730,6 +6739,7 @@
               <a:rPr lang="zh-CN" altLang="en-US" dirty="0"/>
               <a:t>第二级</a:t>
             </a:r>
+            <a:endParaRPr lang="zh-CN" altLang="en-US" dirty="0"/>
           </a:p>
           <a:p>
             <a:pPr lvl="2"/>
@@ -6737,6 +6747,7 @@
               <a:rPr lang="zh-CN" altLang="en-US" dirty="0"/>
               <a:t>第三级</a:t>
             </a:r>
+            <a:endParaRPr lang="zh-CN" altLang="en-US" dirty="0"/>
           </a:p>
           <a:p>
             <a:pPr lvl="3"/>
@@ -6744,6 +6755,7 @@
               <a:rPr lang="zh-CN" altLang="en-US" dirty="0"/>
               <a:t>第四级</a:t>
             </a:r>
+            <a:endParaRPr lang="zh-CN" altLang="en-US" dirty="0"/>
           </a:p>
           <a:p>
             <a:pPr lvl="4"/>
@@ -6751,6 +6763,7 @@
               <a:rPr lang="zh-CN" altLang="en-US" dirty="0"/>
               <a:t>第五级</a:t>
             </a:r>
+            <a:endParaRPr lang="zh-CN" altLang="en-US" dirty="0"/>
           </a:p>
         </p:txBody>
       </p:sp>
@@ -6799,7 +6812,6 @@
             <a:pPr algn="ctr">
               <a:defRPr/>
             </a:pPr>
-            <a:endParaRPr/>
           </a:p>
         </p:txBody>
       </p:sp>
@@ -6848,7 +6860,6 @@
             <a:pPr algn="ctr">
               <a:defRPr/>
             </a:pPr>
-            <a:endParaRPr/>
           </a:p>
         </p:txBody>
       </p:sp>
@@ -6888,7 +6899,6 @@
             <a:pPr algn="ctr">
               <a:defRPr/>
             </a:pPr>
-            <a:endParaRPr/>
           </a:p>
         </p:txBody>
       </p:sp>
@@ -6928,7 +6938,6 @@
             <a:pPr algn="ctr">
               <a:defRPr/>
             </a:pPr>
-            <a:endParaRPr/>
           </a:p>
         </p:txBody>
       </p:sp>
@@ -6970,7 +6979,6 @@
             <a:pPr algn="ctr">
               <a:defRPr/>
             </a:pPr>
-            <a:endParaRPr/>
           </a:p>
         </p:txBody>
       </p:sp>
@@ -7012,7 +7020,6 @@
             <a:pPr algn="ctr">
               <a:defRPr/>
             </a:pPr>
-            <a:endParaRPr/>
           </a:p>
         </p:txBody>
       </p:sp>
@@ -7097,7 +7104,6 @@
             <a:pPr algn="ctr">
               <a:defRPr/>
             </a:pPr>
-            <a:endParaRPr/>
           </a:p>
         </p:txBody>
       </p:sp>
@@ -7127,7 +7133,6 @@
           <a:p>
             <a:fld id="{49AE70B2-8BF9-45C0-BB95-33D1B9D3A854}" type="slidenum">
               <a:rPr lang="zh-CN" altLang="en-US" smtClean="0"/>
-              <a:t>‹#›</a:t>
             </a:fld>
             <a:endParaRPr lang="en-US" altLang="zh-CN"/>
           </a:p>
@@ -7211,6 +7216,7 @@
               <a:rPr lang="zh-CN" altLang="en-US"/>
               <a:t>单击此处编辑母版标题样式</a:t>
             </a:r>
+            <a:endParaRPr lang="zh-CN" altLang="en-US"/>
           </a:p>
         </p:txBody>
       </p:sp>
@@ -7259,7 +7265,6 @@
             <a:pPr algn="ctr">
               <a:defRPr/>
             </a:pPr>
-            <a:endParaRPr/>
           </a:p>
         </p:txBody>
       </p:sp>
@@ -7308,7 +7313,6 @@
             <a:pPr algn="ctr">
               <a:defRPr/>
             </a:pPr>
-            <a:endParaRPr/>
           </a:p>
         </p:txBody>
       </p:sp>
@@ -7361,7 +7365,6 @@
             <a:pPr algn="ctr">
               <a:defRPr/>
             </a:pPr>
-            <a:endParaRPr/>
           </a:p>
         </p:txBody>
       </p:sp>
@@ -7391,7 +7394,6 @@
           <a:p>
             <a:fld id="{49AE70B2-8BF9-45C0-BB95-33D1B9D3A854}" type="slidenum">
               <a:rPr lang="zh-CN" altLang="en-US" smtClean="0"/>
-              <a:t>‹#›</a:t>
             </a:fld>
             <a:endParaRPr lang="en-US" altLang="zh-CN"/>
           </a:p>
@@ -7525,6 +7527,7 @@
               <a:rPr lang="zh-CN" altLang="en-US" dirty="0"/>
               <a:t>单击此处编辑母版标题样式</a:t>
             </a:r>
+            <a:endParaRPr lang="zh-CN" altLang="en-US" dirty="0"/>
           </a:p>
         </p:txBody>
       </p:sp>
@@ -7545,7 +7548,6 @@
           <a:p>
             <a:fld id="{760FBDFE-C587-4B4C-A407-44438C67B59E}" type="datetimeFigureOut">
               <a:rPr lang="zh-CN" altLang="en-US" smtClean="0"/>
-              <a:t>2026/9/6</a:t>
             </a:fld>
             <a:endParaRPr lang="zh-CN" altLang="en-US"/>
           </a:p>
@@ -7587,7 +7589,6 @@
           <a:p>
             <a:fld id="{49AE70B2-8BF9-45C0-BB95-33D1B9D3A854}" type="slidenum">
               <a:rPr lang="zh-CN" altLang="en-US" smtClean="0"/>
-              <a:t>‹#›</a:t>
             </a:fld>
             <a:endParaRPr lang="zh-CN" altLang="en-US"/>
           </a:p>
@@ -7665,7 +7666,6 @@
             <a:pPr algn="ctr">
               <a:defRPr/>
             </a:pPr>
-            <a:endParaRPr/>
           </a:p>
         </p:txBody>
       </p:sp>
@@ -7731,7 +7731,6 @@
             <a:pPr algn="ctr">
               <a:defRPr/>
             </a:pPr>
-            <a:endParaRPr/>
           </a:p>
         </p:txBody>
       </p:sp>
@@ -7793,7 +7792,6 @@
             <a:pPr algn="ctr">
               <a:defRPr/>
             </a:pPr>
-            <a:endParaRPr/>
           </a:p>
         </p:txBody>
       </p:sp>
@@ -7836,6 +7834,7 @@
               <a:rPr lang="zh-CN" altLang="en-US"/>
               <a:t>编号</a:t>
             </a:r>
+            <a:endParaRPr lang="zh-CN" altLang="en-US"/>
           </a:p>
         </p:txBody>
       </p:sp>
@@ -7958,6 +7957,7 @@
               <a:rPr lang="zh-CN" altLang="en-US" dirty="0"/>
               <a:t>单击此处编辑母版标题样式</a:t>
             </a:r>
+            <a:endParaRPr lang="zh-CN" altLang="en-US" dirty="0"/>
           </a:p>
         </p:txBody>
       </p:sp>
@@ -7991,6 +7991,7 @@
               <a:rPr lang="zh-CN" altLang="en-US" dirty="0"/>
               <a:t>单击此处编辑母版文本样式</a:t>
             </a:r>
+            <a:endParaRPr lang="zh-CN" altLang="en-US" dirty="0"/>
           </a:p>
           <a:p>
             <a:pPr lvl="1"/>
@@ -7998,6 +7999,7 @@
               <a:rPr lang="zh-CN" altLang="en-US" dirty="0"/>
               <a:t>第二级</a:t>
             </a:r>
+            <a:endParaRPr lang="zh-CN" altLang="en-US" dirty="0"/>
           </a:p>
           <a:p>
             <a:pPr lvl="2"/>
@@ -8005,6 +8007,7 @@
               <a:rPr lang="zh-CN" altLang="en-US" dirty="0"/>
               <a:t>第三级</a:t>
             </a:r>
+            <a:endParaRPr lang="zh-CN" altLang="en-US" dirty="0"/>
           </a:p>
           <a:p>
             <a:pPr lvl="3"/>
@@ -8012,6 +8015,7 @@
               <a:rPr lang="zh-CN" altLang="en-US" dirty="0"/>
               <a:t>第四级</a:t>
             </a:r>
+            <a:endParaRPr lang="zh-CN" altLang="en-US" dirty="0"/>
           </a:p>
           <a:p>
             <a:pPr lvl="4"/>
@@ -8019,6 +8023,7 @@
               <a:rPr lang="zh-CN" altLang="en-US" dirty="0"/>
               <a:t>第五级</a:t>
             </a:r>
+            <a:endParaRPr lang="zh-CN" altLang="en-US" dirty="0"/>
           </a:p>
         </p:txBody>
       </p:sp>
@@ -8059,7 +8064,6 @@
           <a:p>
             <a:fld id="{760FBDFE-C587-4B4C-A407-44438C67B59E}" type="datetimeFigureOut">
               <a:rPr lang="zh-CN" altLang="en-US" smtClean="0"/>
-              <a:t>2026/9/6</a:t>
             </a:fld>
             <a:endParaRPr lang="zh-CN" altLang="en-US"/>
           </a:p>
@@ -8141,7 +8145,6 @@
           <a:p>
             <a:fld id="{49AE70B2-8BF9-45C0-BB95-33D1B9D3A854}" type="slidenum">
               <a:rPr lang="zh-CN" altLang="en-US" smtClean="0"/>
-              <a:t>‹#›</a:t>
             </a:fld>
             <a:endParaRPr lang="zh-CN" altLang="en-US"/>
           </a:p>
@@ -8156,7 +8159,7 @@
           <p:nvPr userDrawn="1"/>
         </p:nvPicPr>
         <p:blipFill>
-          <a:blip r:embed="rId16"/>
+          <a:blip r:embed="rId15"/>
           <a:stretch>
             <a:fillRect/>
           </a:stretch>
@@ -8519,6 +8522,7 @@
               <a:rPr lang="zh-CN" sz="6000"/>
               <a:t>大模型是如何生成内容的</a:t>
             </a:r>
+            <a:endParaRPr lang="zh-CN" sz="6000"/>
           </a:p>
         </p:txBody>
       </p:sp>
@@ -8541,6 +8545,7 @@
               <a:rPr lang="zh-CN" altLang="en-US"/>
               <a:t>港科大人工智能前沿系列课程——大模型基础通识</a:t>
             </a:r>
+            <a:endParaRPr lang="zh-CN" altLang="en-US"/>
           </a:p>
           <a:p>
             <a:endParaRPr lang="zh-CN" altLang="en-US"/>
@@ -8566,6 +8571,7 @@
               <a:rPr lang="zh-CN" altLang="en-US"/>
               <a:t>授课人：王若愚</a:t>
             </a:r>
+            <a:endParaRPr lang="zh-CN" altLang="en-US"/>
           </a:p>
         </p:txBody>
       </p:sp>
@@ -8588,6 +8594,7 @@
               <a:rPr lang="en-US" altLang="zh-CN" dirty="0"/>
               <a:t>2026/09/01</a:t>
             </a:r>
+            <a:endParaRPr lang="en-US" altLang="zh-CN" dirty="0"/>
           </a:p>
         </p:txBody>
       </p:sp>
@@ -8637,6 +8644,7 @@
               <a:rPr lang="zh-CN" altLang="en-US" dirty="0"/>
               <a:t>实践的经验</a:t>
             </a:r>
+            <a:endParaRPr lang="zh-CN" altLang="en-US" dirty="0"/>
           </a:p>
         </p:txBody>
       </p:sp>
@@ -8657,7 +8665,6 @@
           <a:p>
             <a:fld id="{49AE70B2-8BF9-45C0-BB95-33D1B9D3A854}" type="slidenum">
               <a:rPr lang="zh-CN" altLang="en-US" smtClean="0"/>
-              <a:t>10</a:t>
             </a:fld>
             <a:endParaRPr lang="en-US" altLang="zh-CN"/>
           </a:p>
@@ -8715,7 +8722,6 @@
               <a:pPr algn="ctr">
                 <a:defRPr/>
               </a:pPr>
-              <a:endParaRPr/>
             </a:p>
           </p:txBody>
         </p:sp>
@@ -8753,7 +8759,6 @@
               <a:pPr algn="ctr">
                 <a:defRPr/>
               </a:pPr>
-              <a:endParaRPr/>
             </a:p>
           </p:txBody>
         </p:sp>
@@ -8812,6 +8817,15 @@
                 </a:rPr>
                 <a:t>模型决定能力上限</a:t>
               </a:r>
+              <a:endParaRPr lang="zh-CN" altLang="en-US" sz="2400" b="1" i="0" u="none" strike="noStrike">
+                <a:solidFill>
+                  <a:srgbClr val="69F0AE"/>
+                </a:solidFill>
+                <a:latin typeface="Noto Sans SC"/>
+                <a:ea typeface="Noto Sans SC"/>
+                <a:cs typeface="Noto Sans SC"/>
+                <a:sym typeface="Noto Sans SC"/>
+              </a:endParaRPr>
             </a:p>
           </p:txBody>
         </p:sp>
@@ -8858,6 +8872,15 @@
                 </a:rPr>
                 <a:t>如果模型本身不了解某类任务，驾驭层设计再精巧也不能让模型凭空习得新的能力。</a:t>
               </a:r>
+              <a:endParaRPr lang="zh-CN" altLang="en-US" sz="1600" b="0" i="0" u="none" strike="noStrike">
+                <a:solidFill>
+                  <a:srgbClr val="AAAAAA"/>
+                </a:solidFill>
+                <a:latin typeface="Noto Sans SC"/>
+                <a:ea typeface="SimSun" charset="0"/>
+                <a:cs typeface="Noto Sans SC"/>
+                <a:sym typeface="Noto Sans SC"/>
+              </a:endParaRPr>
             </a:p>
           </p:txBody>
         </p:sp>
@@ -8914,7 +8937,6 @@
               <a:pPr algn="ctr">
                 <a:defRPr/>
               </a:pPr>
-              <a:endParaRPr/>
             </a:p>
           </p:txBody>
         </p:sp>
@@ -8952,7 +8974,6 @@
               <a:pPr algn="ctr">
                 <a:defRPr/>
               </a:pPr>
-              <a:endParaRPr/>
             </a:p>
           </p:txBody>
         </p:sp>
@@ -9011,6 +9032,15 @@
                 </a:rPr>
                 <a:t>驾驭层决定实际效果</a:t>
               </a:r>
+              <a:endParaRPr lang="zh-CN" altLang="en-US" sz="2400" b="1" i="0" u="none" strike="noStrike">
+                <a:solidFill>
+                  <a:srgbClr val="B388FF"/>
+                </a:solidFill>
+                <a:latin typeface="Noto Sans SC"/>
+                <a:ea typeface="Noto Sans SC"/>
+                <a:cs typeface="Noto Sans SC"/>
+                <a:sym typeface="Noto Sans SC"/>
+              </a:endParaRPr>
             </a:p>
           </p:txBody>
         </p:sp>
@@ -9056,6 +9086,14 @@
                 </a:rPr>
                 <a:t>多数情况下，模型的能力并没有完全发挥出来，是因为驾驭层没有进行正确的引导和有效的编排。</a:t>
               </a:r>
+              <a:endParaRPr lang="zh-CN" altLang="en-US" sz="1600">
+                <a:solidFill>
+                  <a:srgbClr val="AAAAAA"/>
+                </a:solidFill>
+                <a:latin typeface="Noto Sans SC"/>
+                <a:ea typeface="SimSun" charset="0"/>
+                <a:cs typeface="Noto Sans SC"/>
+              </a:endParaRPr>
             </a:p>
           </p:txBody>
         </p:sp>
@@ -9112,7 +9150,6 @@
               <a:pPr algn="ctr">
                 <a:defRPr/>
               </a:pPr>
-              <a:endParaRPr/>
             </a:p>
           </p:txBody>
         </p:sp>
@@ -9150,7 +9187,6 @@
               <a:pPr algn="ctr">
                 <a:defRPr/>
               </a:pPr>
-              <a:endParaRPr/>
             </a:p>
           </p:txBody>
         </p:sp>
@@ -9518,6 +9554,7 @@
               <a:rPr lang="zh-CN" altLang="en-US" dirty="0"/>
               <a:t>能理解？</a:t>
             </a:r>
+            <a:endParaRPr lang="zh-CN" altLang="en-US" dirty="0"/>
           </a:p>
         </p:txBody>
       </p:sp>
@@ -9540,6 +9577,7 @@
               <a:rPr lang="zh-CN" altLang="en-US"/>
               <a:t>随机鹦鹉派</a:t>
             </a:r>
+            <a:endParaRPr lang="zh-CN" altLang="en-US"/>
           </a:p>
         </p:txBody>
       </p:sp>
@@ -9568,6 +9606,7 @@
               <a:rPr lang="zh-CN" altLang="en-US" dirty="0"/>
               <a:t>，只是在统计上模仿人类的语言，并没有真正理解</a:t>
             </a:r>
+            <a:endParaRPr lang="zh-CN" altLang="en-US" dirty="0"/>
           </a:p>
           <a:p>
             <a:r>
@@ -9582,6 +9621,7 @@
               <a:rPr lang="zh-CN" altLang="en-US" dirty="0"/>
               <a:t>）</a:t>
             </a:r>
+            <a:endParaRPr lang="zh-CN" altLang="en-US" dirty="0"/>
           </a:p>
         </p:txBody>
       </p:sp>
@@ -9604,6 +9644,7 @@
               <a:rPr lang="zh-CN" altLang="en-US"/>
               <a:t>世界模型派</a:t>
             </a:r>
+            <a:endParaRPr lang="zh-CN" altLang="en-US"/>
           </a:p>
         </p:txBody>
       </p:sp>
@@ -9626,12 +9667,14 @@
               <a:rPr lang="zh-CN" altLang="en-US"/>
               <a:t>要预测得足够好，大模型必须学到语言背后的现实世界模型</a:t>
             </a:r>
+            <a:endParaRPr lang="zh-CN" altLang="en-US"/>
           </a:p>
           <a:p>
             <a:r>
               <a:rPr lang="zh-CN" altLang="en-US"/>
               <a:t>人与人之间认识世界的方式亦有差异，大模型只是用它自己的方式去理解罢了</a:t>
             </a:r>
+            <a:endParaRPr lang="zh-CN" altLang="en-US"/>
           </a:p>
         </p:txBody>
       </p:sp>
@@ -9652,7 +9695,6 @@
           <a:p>
             <a:fld id="{49AE70B2-8BF9-45C0-BB95-33D1B9D3A854}" type="slidenum">
               <a:rPr lang="zh-CN" altLang="en-US" smtClean="0"/>
-              <a:t>11</a:t>
             </a:fld>
             <a:endParaRPr lang="en-US" altLang="zh-CN"/>
           </a:p>
@@ -10110,6 +10152,7 @@
               <a:rPr lang="zh-CN" altLang="en-US"/>
               <a:t>为什么是大模型改变了世界？</a:t>
             </a:r>
+            <a:endParaRPr lang="zh-CN" altLang="en-US"/>
           </a:p>
         </p:txBody>
       </p:sp>
@@ -10132,12 +10175,14 @@
               <a:rPr lang="zh-CN" altLang="en-US" dirty="0"/>
               <a:t>核心：通用性</a:t>
             </a:r>
+            <a:endParaRPr lang="zh-CN" altLang="en-US" dirty="0"/>
           </a:p>
           <a:p>
             <a:r>
               <a:rPr lang="zh-CN" altLang="en-US" dirty="0"/>
               <a:t>以前的机器学习模型是专用工具：</a:t>
             </a:r>
+            <a:endParaRPr lang="zh-CN" altLang="en-US" dirty="0"/>
           </a:p>
           <a:p>
             <a:pPr lvl="1"/>
@@ -10145,6 +10190,7 @@
               <a:rPr lang="zh-CN" altLang="en-US" dirty="0"/>
               <a:t>认图、翻译、下棋</a:t>
             </a:r>
+            <a:endParaRPr lang="zh-CN" altLang="en-US" dirty="0"/>
           </a:p>
           <a:p>
             <a:pPr lvl="1"/>
@@ -10152,6 +10198,7 @@
               <a:rPr lang="zh-CN" altLang="en-US" dirty="0"/>
               <a:t>流水线组合</a:t>
             </a:r>
+            <a:endParaRPr lang="zh-CN" altLang="en-US" dirty="0"/>
           </a:p>
           <a:p>
             <a:pPr lvl="0"/>
@@ -10163,6 +10210,7 @@
               <a:rPr lang="zh-CN" altLang="en-US" dirty="0"/>
               <a:t>大语言模型是通用基座：</a:t>
             </a:r>
+            <a:endParaRPr lang="zh-CN" altLang="en-US" dirty="0"/>
           </a:p>
           <a:p>
             <a:pPr lvl="1"/>
@@ -10170,6 +10218,7 @@
               <a:rPr lang="zh-CN" altLang="en-US" dirty="0"/>
               <a:t>用统一的自然语言形式发布和处理不同任务</a:t>
             </a:r>
+            <a:endParaRPr lang="zh-CN" altLang="en-US" dirty="0"/>
           </a:p>
         </p:txBody>
       </p:sp>
@@ -10190,7 +10239,6 @@
           <a:p>
             <a:fld id="{49AE70B2-8BF9-45C0-BB95-33D1B9D3A854}" type="slidenum">
               <a:rPr lang="zh-CN" altLang="en-US" smtClean="0"/>
-              <a:t>12</a:t>
             </a:fld>
             <a:endParaRPr lang="en-US" altLang="zh-CN"/>
           </a:p>
@@ -10205,7 +10253,7 @@
           <p:nvPr/>
         </p:nvPicPr>
         <p:blipFill>
-          <a:blip r:embed="rId3"/>
+          <a:blip r:embed="rId1"/>
           <a:stretch>
             <a:fillRect/>
           </a:stretch>
@@ -10222,20 +10270,14 @@
       </p:pic>
       <p:pic>
         <p:nvPicPr>
-          <p:cNvPr id="7" name="图片 6">
-            <a:extLst>
-              <a:ext uri="{FF2B5EF4-FFF2-40B4-BE49-F238E27FC236}">
-                <a16:creationId xmlns:a16="http://schemas.microsoft.com/office/drawing/2014/main" id="{BD5270BD-E9D8-5B41-A0B4-0389FAA2357A}"/>
-              </a:ext>
-            </a:extLst>
-          </p:cNvPr>
+          <p:cNvPr id="7" name="图片 6"/>
           <p:cNvPicPr>
             <a:picLocks noChangeAspect="1"/>
           </p:cNvPicPr>
           <p:nvPr/>
         </p:nvPicPr>
         <p:blipFill>
-          <a:blip r:embed="rId4"/>
+          <a:blip r:embed="rId2"/>
           <a:stretch>
             <a:fillRect/>
           </a:stretch>
@@ -10252,20 +10294,14 @@
       </p:pic>
       <p:pic>
         <p:nvPicPr>
-          <p:cNvPr id="9" name="图片 8">
-            <a:extLst>
-              <a:ext uri="{FF2B5EF4-FFF2-40B4-BE49-F238E27FC236}">
-                <a16:creationId xmlns:a16="http://schemas.microsoft.com/office/drawing/2014/main" id="{56F7F3F5-7EAC-99B9-94A9-921579A3D37E}"/>
-              </a:ext>
-            </a:extLst>
-          </p:cNvPr>
+          <p:cNvPr id="9" name="图片 8"/>
           <p:cNvPicPr>
             <a:picLocks noChangeAspect="1"/>
           </p:cNvPicPr>
           <p:nvPr/>
         </p:nvPicPr>
         <p:blipFill>
-          <a:blip r:embed="rId5"/>
+          <a:blip r:embed="rId3"/>
           <a:stretch>
             <a:fillRect/>
           </a:stretch>
@@ -10849,6 +10885,7 @@
               <a:rPr lang="zh-CN" altLang="en-US"/>
               <a:t>总结</a:t>
             </a:r>
+            <a:endParaRPr lang="zh-CN" altLang="en-US"/>
           </a:p>
         </p:txBody>
       </p:sp>
@@ -10945,6 +10982,11 @@
               </a:rPr>
               <a:t>下一节课：</a:t>
             </a:r>
+            <a:endParaRPr lang="zh-CN" altLang="en-US" sz="2800" dirty="0">
+              <a:solidFill>
+                <a:schemeClr val="bg1"/>
+              </a:solidFill>
+            </a:endParaRPr>
           </a:p>
           <a:p>
             <a:pPr lvl="1"/>
@@ -10956,6 +10998,11 @@
               </a:rPr>
               <a:t>为什么模型有时候生成一个字，有时候却一次生成多个字？</a:t>
             </a:r>
+            <a:endParaRPr lang="zh-CN" altLang="en-US" sz="2400" dirty="0">
+              <a:solidFill>
+                <a:schemeClr val="bg1"/>
+              </a:solidFill>
+            </a:endParaRPr>
           </a:p>
           <a:p>
             <a:pPr lvl="1"/>
@@ -10967,6 +11014,11 @@
               </a:rPr>
               <a:t>文字内容是如何转换成大模型内部进行计算的数字的？</a:t>
             </a:r>
+            <a:endParaRPr lang="zh-CN" altLang="en-US" sz="2400" dirty="0">
+              <a:solidFill>
+                <a:schemeClr val="bg1"/>
+              </a:solidFill>
+            </a:endParaRPr>
           </a:p>
         </p:txBody>
       </p:sp>
@@ -10987,7 +11039,6 @@
           <a:p>
             <a:fld id="{49AE70B2-8BF9-45C0-BB95-33D1B9D3A854}" type="slidenum">
               <a:rPr lang="zh-CN" altLang="en-US" smtClean="0"/>
-              <a:t>13</a:t>
             </a:fld>
             <a:endParaRPr lang="en-US" altLang="zh-CN"/>
           </a:p>
@@ -11369,6 +11420,7 @@
               <a:rPr lang="zh-CN" altLang="en-US" dirty="0"/>
               <a:t>回顾</a:t>
             </a:r>
+            <a:endParaRPr lang="zh-CN" altLang="en-US" dirty="0"/>
           </a:p>
         </p:txBody>
       </p:sp>
@@ -11389,7 +11441,6 @@
           <a:p>
             <a:fld id="{49AE70B2-8BF9-45C0-BB95-33D1B9D3A854}" type="slidenum">
               <a:rPr lang="zh-CN" altLang="en-US" smtClean="0"/>
-              <a:t>2</a:t>
             </a:fld>
             <a:endParaRPr lang="en-US" altLang="zh-CN"/>
           </a:p>
@@ -11404,7 +11455,7 @@
           <p:nvPr/>
         </p:nvPicPr>
         <p:blipFill>
-          <a:blip r:embed="rId3">
+          <a:blip r:embed="rId1">
             <a:alphaModFix amt="50000"/>
           </a:blip>
           <a:stretch>
@@ -11452,6 +11503,11 @@
               </a:rPr>
               <a:t>发动机</a:t>
             </a:r>
+            <a:endParaRPr lang="zh-CN" altLang="en-US">
+              <a:solidFill>
+                <a:schemeClr val="bg1"/>
+              </a:solidFill>
+            </a:endParaRPr>
           </a:p>
           <a:p>
             <a:pPr algn="ctr"/>
@@ -11479,6 +11535,11 @@
               </a:rPr>
               <a:t>）</a:t>
             </a:r>
+            <a:endParaRPr lang="zh-CN" altLang="en-US">
+              <a:solidFill>
+                <a:schemeClr val="bg1"/>
+              </a:solidFill>
+            </a:endParaRPr>
           </a:p>
         </p:txBody>
       </p:sp>
@@ -11513,6 +11574,11 @@
               </a:rPr>
               <a:t>车轮</a:t>
             </a:r>
+            <a:endParaRPr lang="zh-CN" altLang="en-US">
+              <a:solidFill>
+                <a:schemeClr val="bg1"/>
+              </a:solidFill>
+            </a:endParaRPr>
           </a:p>
           <a:p>
             <a:pPr algn="ctr"/>
@@ -11540,6 +11606,11 @@
               </a:rPr>
               <a:t>）</a:t>
             </a:r>
+            <a:endParaRPr lang="zh-CN" altLang="en-US">
+              <a:solidFill>
+                <a:schemeClr val="bg1"/>
+              </a:solidFill>
+            </a:endParaRPr>
           </a:p>
         </p:txBody>
       </p:sp>
@@ -11590,6 +11661,11 @@
               </a:rPr>
               <a:t>底盘</a:t>
             </a:r>
+            <a:endParaRPr lang="zh-CN" altLang="en-US">
+              <a:solidFill>
+                <a:schemeClr val="bg1"/>
+              </a:solidFill>
+            </a:endParaRPr>
           </a:p>
           <a:p>
             <a:pPr algn="ctr"/>
@@ -11617,6 +11693,11 @@
               </a:rPr>
               <a:t>）</a:t>
             </a:r>
+            <a:endParaRPr lang="zh-CN" altLang="en-US">
+              <a:solidFill>
+                <a:schemeClr val="bg1"/>
+              </a:solidFill>
+            </a:endParaRPr>
           </a:p>
         </p:txBody>
       </p:sp>
@@ -11651,6 +11732,11 @@
               </a:rPr>
               <a:t>方向盘</a:t>
             </a:r>
+            <a:endParaRPr lang="zh-CN">
+              <a:solidFill>
+                <a:schemeClr val="bg1"/>
+              </a:solidFill>
+            </a:endParaRPr>
           </a:p>
           <a:p>
             <a:pPr algn="ctr"/>
@@ -11678,6 +11764,11 @@
               </a:rPr>
               <a:t>）</a:t>
             </a:r>
+            <a:endParaRPr lang="zh-CN" altLang="en-US">
+              <a:solidFill>
+                <a:schemeClr val="bg1"/>
+              </a:solidFill>
+            </a:endParaRPr>
           </a:p>
         </p:txBody>
       </p:sp>
@@ -11712,6 +11803,11 @@
               </a:rPr>
               <a:t>整车</a:t>
             </a:r>
+            <a:endParaRPr lang="zh-CN">
+              <a:solidFill>
+                <a:schemeClr val="bg1"/>
+              </a:solidFill>
+            </a:endParaRPr>
           </a:p>
           <a:p>
             <a:pPr algn="ctr"/>
@@ -11739,6 +11835,11 @@
               </a:rPr>
               <a:t>）</a:t>
             </a:r>
+            <a:endParaRPr lang="zh-CN" altLang="en-US">
+              <a:solidFill>
+                <a:schemeClr val="bg1"/>
+              </a:solidFill>
+            </a:endParaRPr>
           </a:p>
         </p:txBody>
       </p:sp>
@@ -12533,6 +12634,7 @@
               <a:rPr lang="zh-CN" altLang="en-US"/>
               <a:t>这台“发动机”是如何运转的</a:t>
             </a:r>
+            <a:endParaRPr lang="zh-CN" altLang="en-US"/>
           </a:p>
         </p:txBody>
       </p:sp>
@@ -12555,6 +12657,7 @@
               <a:rPr lang="zh-CN" altLang="en-US"/>
               <a:t>大模型的本体为什么能够源源不断地输出各种各样智能且合理的文字？</a:t>
             </a:r>
+            <a:endParaRPr lang="zh-CN" altLang="en-US"/>
           </a:p>
         </p:txBody>
       </p:sp>
@@ -12575,7 +12678,6 @@
           <a:p>
             <a:fld id="{49AE70B2-8BF9-45C0-BB95-33D1B9D3A854}" type="slidenum">
               <a:rPr lang="zh-CN" altLang="en-US" smtClean="0"/>
-              <a:t>3</a:t>
             </a:fld>
             <a:endParaRPr lang="en-US" altLang="zh-CN"/>
           </a:p>
@@ -12619,7 +12721,7 @@
         <p:spPr/>
         <p:txBody>
           <a:bodyPr>
-            <a:normAutofit/>
+            <a:normAutofit fontScale="90000"/>
           </a:bodyPr>
           <a:lstStyle/>
           <a:p>
@@ -12627,6 +12729,7 @@
               <a:rPr lang="zh-CN" altLang="en-US" dirty="0"/>
               <a:t>课程路线图</a:t>
             </a:r>
+            <a:endParaRPr lang="zh-CN" altLang="en-US" dirty="0"/>
           </a:p>
         </p:txBody>
       </p:sp>
@@ -12647,7 +12750,6 @@
           <a:p>
             <a:fld id="{49AE70B2-8BF9-45C0-BB95-33D1B9D3A854}" type="slidenum">
               <a:rPr lang="zh-CN" altLang="en-US" smtClean="0"/>
-              <a:t>4</a:t>
             </a:fld>
             <a:endParaRPr lang="en-US" altLang="zh-CN"/>
           </a:p>
@@ -12713,6 +12815,15 @@
               </a:rPr>
               <a:t>大</a:t>
             </a:r>
+            <a:endParaRPr lang="zh-CN" altLang="en-US" sz="3200" b="1" i="0" u="none" strike="noStrike">
+              <a:solidFill>
+                <a:srgbClr val="FFFFFF"/>
+              </a:solidFill>
+              <a:latin typeface="Noto Sans SC"/>
+              <a:ea typeface="SimSun" charset="0"/>
+              <a:cs typeface="Noto Sans SC"/>
+              <a:sym typeface="Noto Sans SC"/>
+            </a:endParaRPr>
           </a:p>
           <a:p>
             <a:pPr marL="0" indent="0" algn="ctr">
@@ -12733,6 +12844,15 @@
               </a:rPr>
               <a:t>模</a:t>
             </a:r>
+            <a:endParaRPr lang="zh-CN" altLang="en-US" sz="3200" b="1" i="0" u="none" strike="noStrike">
+              <a:solidFill>
+                <a:srgbClr val="FFFFFF"/>
+              </a:solidFill>
+              <a:latin typeface="Noto Sans SC"/>
+              <a:ea typeface="SimSun" charset="0"/>
+              <a:cs typeface="Noto Sans SC"/>
+              <a:sym typeface="Noto Sans SC"/>
+            </a:endParaRPr>
           </a:p>
           <a:p>
             <a:pPr marL="0" indent="0" algn="ctr">
@@ -12753,6 +12873,15 @@
               </a:rPr>
               <a:t>型</a:t>
             </a:r>
+            <a:endParaRPr lang="zh-CN" altLang="en-US" sz="3200" b="1" i="0" u="none" strike="noStrike">
+              <a:solidFill>
+                <a:srgbClr val="FFFFFF"/>
+              </a:solidFill>
+              <a:latin typeface="Noto Sans SC"/>
+              <a:ea typeface="SimSun" charset="0"/>
+              <a:cs typeface="Noto Sans SC"/>
+              <a:sym typeface="Noto Sans SC"/>
+            </a:endParaRPr>
           </a:p>
           <a:p>
             <a:pPr marL="0" indent="0" algn="ctr">
@@ -12773,6 +12902,15 @@
               </a:rPr>
               <a:t>产</a:t>
             </a:r>
+            <a:endParaRPr lang="zh-CN" altLang="en-US" sz="3200" b="1" i="0" u="none" strike="noStrike">
+              <a:solidFill>
+                <a:srgbClr val="FFFFFF"/>
+              </a:solidFill>
+              <a:latin typeface="Noto Sans SC"/>
+              <a:ea typeface="SimSun" charset="0"/>
+              <a:cs typeface="Noto Sans SC"/>
+              <a:sym typeface="Noto Sans SC"/>
+            </a:endParaRPr>
           </a:p>
           <a:p>
             <a:pPr marL="0" indent="0" algn="ctr">
@@ -12793,271 +12931,15 @@
               </a:rPr>
               <a:t>品</a:t>
             </a:r>
-          </a:p>
-        </p:txBody>
-      </p:sp>
-      <p:sp>
-        <p:nvSpPr>
-          <p:cNvPr id="5" name="AutoShape 6"/>
-          <p:cNvSpPr/>
-          <p:nvPr/>
-        </p:nvSpPr>
-        <p:spPr>
-          <a:xfrm>
-            <a:off x="3395980" y="1753235"/>
-            <a:ext cx="899795" cy="1543050"/>
-          </a:xfrm>
-          <a:prstGeom prst="roundRect">
-            <a:avLst>
-              <a:gd name="adj" fmla="val 0"/>
-            </a:avLst>
-          </a:prstGeom>
-          <a:solidFill>
-            <a:srgbClr val="B388FF">
-              <a:alpha val="8000"/>
-            </a:srgbClr>
-          </a:solidFill>
-          <a:ln w="25400" cap="flat" cmpd="sng">
-            <a:solidFill>
-              <a:srgbClr val="B388FF">
-                <a:alpha val="100000"/>
-              </a:srgbClr>
-            </a:solidFill>
-            <a:prstDash val="solid"/>
-            <a:round/>
-          </a:ln>
-          <a:effectLst>
-            <a:outerShdw blurRad="152400" dir="2700000" algn="tl" rotWithShape="0">
-              <a:srgbClr val="06F0D2">
-                <a:alpha val="40000"/>
-              </a:srgbClr>
-            </a:outerShdw>
-          </a:effectLst>
-        </p:spPr>
-        <p:txBody>
-          <a:bodyPr vert="horz" wrap="square" lIns="0" tIns="0" rIns="0" bIns="0" rtlCol="0" anchor="ctr" anchorCtr="0"/>
-          <a:lstStyle/>
-          <a:p>
-            <a:pPr marL="0" indent="0" algn="ctr">
-              <a:lnSpc>
-                <a:spcPct val="125000"/>
-              </a:lnSpc>
-              <a:defRPr/>
-            </a:pPr>
-            <a:r>
-              <a:rPr lang="zh-CN" altLang="en-US" sz="2400" b="1" i="0" u="none" strike="noStrike">
-                <a:solidFill>
-                  <a:srgbClr val="FFFFFF"/>
-                </a:solidFill>
-                <a:latin typeface="Noto Sans SC"/>
-                <a:ea typeface="SimSun" charset="0"/>
-                <a:cs typeface="Noto Sans SC"/>
-                <a:sym typeface="Noto Sans SC"/>
-              </a:rPr>
-              <a:t>模型</a:t>
-            </a:r>
-          </a:p>
-          <a:p>
-            <a:pPr marL="0" indent="0" algn="ctr">
-              <a:lnSpc>
-                <a:spcPct val="125000"/>
-              </a:lnSpc>
-              <a:defRPr/>
-            </a:pPr>
-            <a:r>
-              <a:rPr lang="zh-CN" altLang="en-US" sz="2400" b="1" i="0" u="none" strike="noStrike">
-                <a:solidFill>
-                  <a:srgbClr val="FFFFFF"/>
-                </a:solidFill>
-                <a:latin typeface="Noto Sans SC"/>
-                <a:ea typeface="SimSun" charset="0"/>
-                <a:cs typeface="Noto Sans SC"/>
-                <a:sym typeface="Noto Sans SC"/>
-              </a:rPr>
-              <a:t>原理</a:t>
-            </a:r>
-          </a:p>
-        </p:txBody>
-      </p:sp>
-      <p:sp>
-        <p:nvSpPr>
-          <p:cNvPr id="7" name="AutoShape 6"/>
-          <p:cNvSpPr/>
-          <p:nvPr/>
-        </p:nvSpPr>
-        <p:spPr>
-          <a:xfrm>
-            <a:off x="3395980" y="3416935"/>
-            <a:ext cx="899795" cy="1547495"/>
-          </a:xfrm>
-          <a:prstGeom prst="roundRect">
-            <a:avLst>
-              <a:gd name="adj" fmla="val 0"/>
-            </a:avLst>
-          </a:prstGeom>
-          <a:solidFill>
-            <a:srgbClr val="B388FF">
-              <a:alpha val="8000"/>
-            </a:srgbClr>
-          </a:solidFill>
-          <a:ln w="25400" cap="flat" cmpd="sng">
-            <a:solidFill>
-              <a:srgbClr val="B388FF">
-                <a:alpha val="100000"/>
-              </a:srgbClr>
-            </a:solidFill>
-            <a:prstDash val="solid"/>
-            <a:round/>
-          </a:ln>
-          <a:effectLst>
-            <a:outerShdw blurRad="152400" dir="2700000" algn="tl" rotWithShape="0">
-              <a:srgbClr val="06F0D2">
-                <a:alpha val="40000"/>
-              </a:srgbClr>
-            </a:outerShdw>
-          </a:effectLst>
-        </p:spPr>
-        <p:txBody>
-          <a:bodyPr vert="horz" wrap="square" lIns="0" tIns="0" rIns="0" bIns="0" rtlCol="0" anchor="ctr" anchorCtr="0">
-            <a:noAutofit/>
-          </a:bodyPr>
-          <a:lstStyle/>
-          <a:p>
-            <a:pPr lvl="0" algn="ctr">
-              <a:lnSpc>
-                <a:spcPct val="125000"/>
-              </a:lnSpc>
-              <a:buClrTx/>
-              <a:buSzTx/>
-              <a:buFontTx/>
-              <a:defRPr/>
-            </a:pPr>
-            <a:r>
-              <a:rPr lang="zh-CN" altLang="en-US" sz="2400" b="1">
-                <a:solidFill>
-                  <a:srgbClr val="FFFFFF"/>
-                </a:solidFill>
-                <a:latin typeface="Noto Sans SC"/>
-                <a:ea typeface="SimSun" charset="0"/>
-                <a:cs typeface="Noto Sans SC"/>
-                <a:sym typeface="Noto Sans SC"/>
-              </a:rPr>
-              <a:t>模型</a:t>
-            </a:r>
-          </a:p>
-          <a:p>
-            <a:pPr lvl="0" algn="ctr">
-              <a:lnSpc>
-                <a:spcPct val="125000"/>
-              </a:lnSpc>
-              <a:buClrTx/>
-              <a:buSzTx/>
-              <a:buFontTx/>
-              <a:defRPr/>
-            </a:pPr>
-            <a:r>
-              <a:rPr lang="zh-CN" altLang="en-US" sz="2400" b="1">
-                <a:solidFill>
-                  <a:srgbClr val="FFFFFF"/>
-                </a:solidFill>
-                <a:latin typeface="Noto Sans SC"/>
-                <a:ea typeface="SimSun" charset="0"/>
-                <a:cs typeface="Noto Sans SC"/>
-                <a:sym typeface="Noto Sans SC"/>
-              </a:rPr>
-              <a:t>应用</a:t>
-            </a:r>
-          </a:p>
-        </p:txBody>
-      </p:sp>
-      <p:sp>
-        <p:nvSpPr>
-          <p:cNvPr id="8" name="AutoShape 6"/>
-          <p:cNvSpPr/>
-          <p:nvPr/>
-        </p:nvSpPr>
-        <p:spPr>
-          <a:xfrm>
-            <a:off x="3395980" y="5086985"/>
-            <a:ext cx="899795" cy="989330"/>
-          </a:xfrm>
-          <a:prstGeom prst="roundRect">
-            <a:avLst>
-              <a:gd name="adj" fmla="val 0"/>
-            </a:avLst>
-          </a:prstGeom>
-          <a:solidFill>
-            <a:srgbClr val="B388FF">
-              <a:alpha val="8000"/>
-            </a:srgbClr>
-          </a:solidFill>
-          <a:ln w="25400" cap="flat" cmpd="sng">
-            <a:solidFill>
-              <a:srgbClr val="B388FF">
-                <a:alpha val="100000"/>
-              </a:srgbClr>
-            </a:solidFill>
-            <a:prstDash val="solid"/>
-            <a:round/>
-          </a:ln>
-          <a:effectLst>
-            <a:outerShdw blurRad="152400" dir="2700000" algn="tl" rotWithShape="0">
-              <a:srgbClr val="06F0D2">
-                <a:alpha val="40000"/>
-              </a:srgbClr>
-            </a:outerShdw>
-          </a:effectLst>
-        </p:spPr>
-        <p:txBody>
-          <a:bodyPr vert="horz" wrap="square" lIns="0" tIns="0" rIns="0" bIns="0" rtlCol="0" anchor="ctr" anchorCtr="0">
-            <a:noAutofit/>
-          </a:bodyPr>
-          <a:lstStyle/>
-          <a:p>
-            <a:pPr lvl="0" algn="ctr">
-              <a:lnSpc>
-                <a:spcPct val="125000"/>
-              </a:lnSpc>
-              <a:buClrTx/>
-              <a:buSzTx/>
-              <a:buFontTx/>
-              <a:defRPr/>
-            </a:pPr>
-            <a:r>
-              <a:rPr lang="zh-CN" altLang="en-US" sz="2400" b="1">
-                <a:solidFill>
-                  <a:srgbClr val="FFFFFF"/>
-                </a:solidFill>
-                <a:latin typeface="Noto Sans SC"/>
-                <a:ea typeface="SimSun" charset="0"/>
-                <a:cs typeface="Noto Sans SC"/>
-                <a:sym typeface="Noto Sans SC"/>
-              </a:rPr>
-              <a:t>智</a:t>
-            </a:r>
-          </a:p>
-          <a:p>
-            <a:pPr lvl="0" algn="ctr">
-              <a:lnSpc>
-                <a:spcPct val="125000"/>
-              </a:lnSpc>
-              <a:buClrTx/>
-              <a:buSzTx/>
-              <a:buFontTx/>
-              <a:defRPr/>
-            </a:pPr>
-            <a:r>
-              <a:rPr lang="zh-CN" altLang="en-US" sz="2400" b="1">
-                <a:solidFill>
-                  <a:srgbClr val="FFFFFF"/>
-                </a:solidFill>
-                <a:latin typeface="Noto Sans SC"/>
-                <a:ea typeface="SimSun" charset="0"/>
-                <a:cs typeface="Noto Sans SC"/>
-                <a:sym typeface="Noto Sans SC"/>
-              </a:rPr>
-              <a:t>能体</a:t>
-            </a:r>
+            <a:endParaRPr lang="zh-CN" altLang="en-US" sz="3200" b="1" i="0" u="none" strike="noStrike">
+              <a:solidFill>
+                <a:srgbClr val="FFFFFF"/>
+              </a:solidFill>
+              <a:latin typeface="Noto Sans SC"/>
+              <a:ea typeface="SimSun" charset="0"/>
+              <a:cs typeface="Noto Sans SC"/>
+              <a:sym typeface="Noto Sans SC"/>
+            </a:endParaRPr>
           </a:p>
         </p:txBody>
       </p:sp>
@@ -13113,7 +12995,6 @@
               <a:pPr algn="ctr">
                 <a:defRPr/>
               </a:pPr>
-              <a:endParaRPr/>
             </a:p>
           </p:txBody>
         </p:sp>
@@ -13149,7 +13030,6 @@
               <a:pPr algn="ctr">
                 <a:defRPr/>
               </a:pPr>
-              <a:endParaRPr/>
             </a:p>
           </p:txBody>
         </p:sp>
@@ -13187,6 +13067,14 @@
                 </a:rPr>
                 <a:t>01</a:t>
               </a:r>
+              <a:endParaRPr lang="en-US" b="1" kern="0">
+                <a:solidFill>
+                  <a:srgbClr val="69F0AE"/>
+                </a:solidFill>
+                <a:latin typeface="Noto Sans SC"/>
+                <a:ea typeface="Noto Sans SC"/>
+                <a:cs typeface="Noto Sans SC"/>
+              </a:endParaRPr>
             </a:p>
           </p:txBody>
         </p:sp>
@@ -13222,8 +13110,16 @@
                   <a:ea typeface="Noto Sans SC"/>
                   <a:cs typeface="Noto Sans SC"/>
                 </a:rPr>
-                <a:t>模型定位和介绍</a:t>
+                <a:t>AI产品定位和介绍</a:t>
               </a:r>
+              <a:endParaRPr lang="zh-CN" altLang="en-US" b="1" kern="0">
+                <a:solidFill>
+                  <a:srgbClr val="69F0AE"/>
+                </a:solidFill>
+                <a:latin typeface="Noto Sans SC"/>
+                <a:ea typeface="Noto Sans SC"/>
+                <a:cs typeface="Noto Sans SC"/>
+              </a:endParaRPr>
             </a:p>
           </p:txBody>
         </p:sp>
@@ -13372,6 +13268,16 @@
                 </a:rPr>
                 <a:t>05</a:t>
               </a:r>
+              <a:endParaRPr lang="en-US" b="1" kern="0">
+                <a:solidFill>
+                  <a:schemeClr val="bg1">
+                    <a:lumMod val="50000"/>
+                  </a:schemeClr>
+                </a:solidFill>
+                <a:latin typeface="Noto Sans SC"/>
+                <a:ea typeface="Noto Sans SC"/>
+                <a:cs typeface="Noto Sans SC"/>
+              </a:endParaRPr>
             </a:p>
           </p:txBody>
         </p:sp>
@@ -13409,8 +13315,18 @@
                   <a:ea typeface="Noto Sans SC"/>
                   <a:cs typeface="Noto Sans SC"/>
                 </a:rPr>
-                <a:t>模型训练、选型与评估</a:t>
+                <a:t>大模型的训练、选型与评估</a:t>
               </a:r>
+              <a:endParaRPr lang="zh-CN" altLang="en-US" b="1" kern="0">
+                <a:solidFill>
+                  <a:schemeClr val="bg1">
+                    <a:lumMod val="50000"/>
+                  </a:schemeClr>
+                </a:solidFill>
+                <a:latin typeface="Noto Sans SC"/>
+                <a:ea typeface="Noto Sans SC"/>
+                <a:cs typeface="Noto Sans SC"/>
+              </a:endParaRPr>
             </a:p>
           </p:txBody>
         </p:sp>
@@ -13559,6 +13475,16 @@
                 </a:rPr>
                 <a:t>07</a:t>
               </a:r>
+              <a:endParaRPr lang="en-US" b="1" kern="0">
+                <a:solidFill>
+                  <a:schemeClr val="bg1">
+                    <a:lumMod val="50000"/>
+                  </a:schemeClr>
+                </a:solidFill>
+                <a:latin typeface="Noto Sans SC"/>
+                <a:ea typeface="Noto Sans SC"/>
+                <a:cs typeface="Noto Sans SC"/>
+              </a:endParaRPr>
             </a:p>
           </p:txBody>
         </p:sp>
@@ -13596,8 +13522,18 @@
                   <a:ea typeface="Noto Sans SC"/>
                   <a:cs typeface="Noto Sans SC"/>
                 </a:rPr>
-                <a:t>智能体框架与工具使用</a:t>
+                <a:t>大模型的思维提示、智能体与工具</a:t>
               </a:r>
+              <a:endParaRPr lang="zh-CN" altLang="en-US" b="1" kern="0">
+                <a:solidFill>
+                  <a:schemeClr val="bg1">
+                    <a:lumMod val="50000"/>
+                  </a:schemeClr>
+                </a:solidFill>
+                <a:latin typeface="Noto Sans SC"/>
+                <a:ea typeface="Noto Sans SC"/>
+                <a:cs typeface="Noto Sans SC"/>
+              </a:endParaRPr>
             </a:p>
           </p:txBody>
         </p:sp>
@@ -13654,7 +13590,6 @@
               <a:pPr algn="ctr">
                 <a:defRPr/>
               </a:pPr>
-              <a:endParaRPr/>
             </a:p>
           </p:txBody>
         </p:sp>
@@ -13690,7 +13625,6 @@
               <a:pPr algn="ctr">
                 <a:defRPr/>
               </a:pPr>
-              <a:endParaRPr/>
             </a:p>
           </p:txBody>
         </p:sp>
@@ -13728,6 +13662,14 @@
                 </a:rPr>
                 <a:t>02</a:t>
               </a:r>
+              <a:endParaRPr lang="en-US" b="1" kern="0">
+                <a:solidFill>
+                  <a:srgbClr val="FFE3B1"/>
+                </a:solidFill>
+                <a:latin typeface="Noto Sans SC"/>
+                <a:ea typeface="Noto Sans SC"/>
+                <a:cs typeface="Noto Sans SC"/>
+              </a:endParaRPr>
             </a:p>
           </p:txBody>
         </p:sp>
@@ -13763,8 +13705,16 @@
                   <a:ea typeface="Noto Sans SC"/>
                   <a:cs typeface="Noto Sans SC"/>
                 </a:rPr>
-                <a:t>生成机制</a:t>
+                <a:t>大模型的生成机制</a:t>
               </a:r>
+              <a:endParaRPr lang="zh-CN" altLang="en-US" b="1" kern="0">
+                <a:solidFill>
+                  <a:srgbClr val="FFE3B1"/>
+                </a:solidFill>
+                <a:latin typeface="Noto Sans SC"/>
+                <a:ea typeface="Noto Sans SC"/>
+                <a:cs typeface="Noto Sans SC"/>
+              </a:endParaRPr>
             </a:p>
           </p:txBody>
         </p:sp>
@@ -13823,7 +13773,6 @@
               <a:pPr algn="ctr">
                 <a:defRPr/>
               </a:pPr>
-              <a:endParaRPr/>
             </a:p>
           </p:txBody>
         </p:sp>
@@ -13861,7 +13810,6 @@
               <a:pPr algn="ctr">
                 <a:defRPr/>
               </a:pPr>
-              <a:endParaRPr/>
             </a:p>
           </p:txBody>
         </p:sp>
@@ -13901,6 +13849,16 @@
                 </a:rPr>
                 <a:t>03</a:t>
               </a:r>
+              <a:endParaRPr lang="en-US" b="1" kern="0">
+                <a:solidFill>
+                  <a:schemeClr val="bg1">
+                    <a:lumMod val="50000"/>
+                  </a:schemeClr>
+                </a:solidFill>
+                <a:latin typeface="Noto Sans SC"/>
+                <a:ea typeface="Noto Sans SC"/>
+                <a:cs typeface="Noto Sans SC"/>
+              </a:endParaRPr>
             </a:p>
           </p:txBody>
         </p:sp>
@@ -13938,7 +13896,33 @@
                   <a:ea typeface="Noto Sans SC"/>
                   <a:cs typeface="Noto Sans SC"/>
                 </a:rPr>
-                <a:t>token、embedding </a:t>
+                <a:t>Token</a:t>
+              </a:r>
+              <a:r>
+                <a:rPr lang="zh-CN" altLang="en-US" b="1" kern="0">
+                  <a:solidFill>
+                    <a:schemeClr val="bg1">
+                      <a:lumMod val="50000"/>
+                    </a:schemeClr>
+                  </a:solidFill>
+                  <a:latin typeface="Noto Sans SC"/>
+                  <a:ea typeface="SimSun" charset="0"/>
+                  <a:cs typeface="Noto Sans SC"/>
+                </a:rPr>
+                <a:t>、</a:t>
+              </a:r>
+              <a:r>
+                <a:rPr lang="en-US" altLang="zh-CN" b="1" kern="0">
+                  <a:solidFill>
+                    <a:schemeClr val="bg1">
+                      <a:lumMod val="50000"/>
+                    </a:schemeClr>
+                  </a:solidFill>
+                  <a:latin typeface="Noto Sans SC"/>
+                  <a:ea typeface="Noto Sans SC"/>
+                  <a:cs typeface="Noto Sans SC"/>
+                </a:rPr>
+                <a:t>Embedding </a:t>
               </a:r>
               <a:r>
                 <a:rPr lang="zh-CN" altLang="en-US" b="1" kern="0">
@@ -13951,8 +13935,18 @@
                   <a:ea typeface="Noto Sans SC"/>
                   <a:cs typeface="Noto Sans SC"/>
                 </a:rPr>
-                <a:t>和上下文窗口</a:t>
+                <a:t>和 RAG</a:t>
               </a:r>
+              <a:endParaRPr lang="zh-CN" altLang="en-US" b="1" kern="0">
+                <a:solidFill>
+                  <a:schemeClr val="bg1">
+                    <a:lumMod val="50000"/>
+                  </a:schemeClr>
+                </a:solidFill>
+                <a:latin typeface="Noto Sans SC"/>
+                <a:ea typeface="Noto Sans SC"/>
+                <a:cs typeface="Noto Sans SC"/>
+              </a:endParaRPr>
             </a:p>
           </p:txBody>
         </p:sp>
@@ -14101,6 +14095,16 @@
                 </a:rPr>
                 <a:t>04</a:t>
               </a:r>
+              <a:endParaRPr lang="en-US" b="1" kern="0">
+                <a:solidFill>
+                  <a:schemeClr val="bg1">
+                    <a:lumMod val="50000"/>
+                  </a:schemeClr>
+                </a:solidFill>
+                <a:latin typeface="Noto Sans SC"/>
+                <a:ea typeface="Noto Sans SC"/>
+                <a:cs typeface="Noto Sans SC"/>
+              </a:endParaRPr>
             </a:p>
           </p:txBody>
         </p:sp>
@@ -14138,8 +14142,18 @@
                   <a:ea typeface="Noto Sans SC"/>
                   <a:cs typeface="Noto Sans SC"/>
                 </a:rPr>
-                <a:t>注意力、算力和模型大小</a:t>
+                <a:t>Transformer、注意力、算力与缓存机制</a:t>
               </a:r>
+              <a:endParaRPr lang="zh-CN" altLang="en-US" b="1" kern="0">
+                <a:solidFill>
+                  <a:schemeClr val="bg1">
+                    <a:lumMod val="50000"/>
+                  </a:schemeClr>
+                </a:solidFill>
+                <a:latin typeface="Noto Sans SC"/>
+                <a:ea typeface="Noto Sans SC"/>
+                <a:cs typeface="Noto Sans SC"/>
+              </a:endParaRPr>
             </a:p>
           </p:txBody>
         </p:sp>
@@ -14288,6 +14302,16 @@
                 </a:rPr>
                 <a:t>06</a:t>
               </a:r>
+              <a:endParaRPr lang="en-US" b="1" kern="0">
+                <a:solidFill>
+                  <a:schemeClr val="bg1">
+                    <a:lumMod val="50000"/>
+                  </a:schemeClr>
+                </a:solidFill>
+                <a:latin typeface="Noto Sans SC"/>
+                <a:ea typeface="Noto Sans SC"/>
+                <a:cs typeface="Noto Sans SC"/>
+              </a:endParaRPr>
             </a:p>
           </p:txBody>
         </p:sp>
@@ -14325,8 +14349,18 @@
                   <a:ea typeface="Noto Sans SC"/>
                   <a:cs typeface="Noto Sans SC"/>
                 </a:rPr>
-                <a:t>提示词技术</a:t>
+                <a:t>提示词与提示词工程</a:t>
               </a:r>
+              <a:endParaRPr lang="zh-CN" altLang="en-US" b="1" kern="0">
+                <a:solidFill>
+                  <a:schemeClr val="bg1">
+                    <a:lumMod val="50000"/>
+                  </a:schemeClr>
+                </a:solidFill>
+                <a:latin typeface="Noto Sans SC"/>
+                <a:ea typeface="Noto Sans SC"/>
+                <a:cs typeface="Noto Sans SC"/>
+              </a:endParaRPr>
             </a:p>
           </p:txBody>
         </p:sp>
@@ -14475,6 +14509,16 @@
                 </a:rPr>
                 <a:t>08</a:t>
               </a:r>
+              <a:endParaRPr lang="en-US" b="1" kern="0">
+                <a:solidFill>
+                  <a:schemeClr val="bg1">
+                    <a:lumMod val="50000"/>
+                  </a:schemeClr>
+                </a:solidFill>
+                <a:latin typeface="Noto Sans SC"/>
+                <a:ea typeface="Noto Sans SC"/>
+                <a:cs typeface="Noto Sans SC"/>
+              </a:endParaRPr>
             </a:p>
           </p:txBody>
         </p:sp>
@@ -14512,12 +14556,264 @@
                   <a:ea typeface="Noto Sans SC"/>
                   <a:cs typeface="Noto Sans SC"/>
                 </a:rPr>
-                <a:t>智能体记忆与案例剖析</a:t>
+                <a:t>智能体记忆、技能与案例</a:t>
               </a:r>
+              <a:endParaRPr lang="zh-CN" altLang="en-US" b="1" kern="0">
+                <a:solidFill>
+                  <a:schemeClr val="bg1">
+                    <a:lumMod val="50000"/>
+                  </a:schemeClr>
+                </a:solidFill>
+                <a:latin typeface="Noto Sans SC"/>
+                <a:ea typeface="Noto Sans SC"/>
+                <a:cs typeface="Noto Sans SC"/>
+              </a:endParaRPr>
             </a:p>
           </p:txBody>
         </p:sp>
       </p:grpSp>
+      <p:sp>
+        <p:nvSpPr>
+          <p:cNvPr id="3" name="AutoShape 6"/>
+          <p:cNvSpPr/>
+          <p:nvPr/>
+        </p:nvSpPr>
+        <p:spPr>
+          <a:xfrm>
+            <a:off x="3395980" y="1753235"/>
+            <a:ext cx="899795" cy="2653665"/>
+          </a:xfrm>
+          <a:prstGeom prst="roundRect">
+            <a:avLst>
+              <a:gd name="adj" fmla="val 0"/>
+            </a:avLst>
+          </a:prstGeom>
+          <a:solidFill>
+            <a:srgbClr val="B388FF">
+              <a:alpha val="8000"/>
+            </a:srgbClr>
+          </a:solidFill>
+          <a:ln w="25400" cap="flat" cmpd="sng">
+            <a:solidFill>
+              <a:srgbClr val="B388FF">
+                <a:alpha val="100000"/>
+              </a:srgbClr>
+            </a:solidFill>
+            <a:prstDash val="solid"/>
+            <a:round/>
+          </a:ln>
+          <a:effectLst>
+            <a:outerShdw blurRad="152400" dir="2700000" algn="tl" rotWithShape="0">
+              <a:srgbClr val="06F0D2">
+                <a:alpha val="40000"/>
+              </a:srgbClr>
+            </a:outerShdw>
+          </a:effectLst>
+        </p:spPr>
+        <p:txBody>
+          <a:bodyPr vert="horz" wrap="square" lIns="0" tIns="0" rIns="0" bIns="0" rtlCol="0" anchor="ctr" anchorCtr="0"/>
+          <a:lstStyle/>
+          <a:p>
+            <a:pPr marL="0" indent="0" algn="ctr">
+              <a:lnSpc>
+                <a:spcPct val="125000"/>
+              </a:lnSpc>
+              <a:defRPr/>
+            </a:pPr>
+            <a:r>
+              <a:rPr lang="zh-CN" altLang="en-US" sz="2400" b="1" i="0" u="none" strike="noStrike">
+                <a:solidFill>
+                  <a:srgbClr val="FFFFFF"/>
+                </a:solidFill>
+                <a:latin typeface="Noto Sans SC"/>
+                <a:ea typeface="SimSun" charset="0"/>
+                <a:cs typeface="Noto Sans SC"/>
+                <a:sym typeface="Noto Sans SC"/>
+              </a:rPr>
+              <a:t>模型</a:t>
+            </a:r>
+            <a:endParaRPr lang="zh-CN" altLang="en-US" sz="2400" b="1" i="0" u="none" strike="noStrike">
+              <a:solidFill>
+                <a:srgbClr val="FFFFFF"/>
+              </a:solidFill>
+              <a:latin typeface="Noto Sans SC"/>
+              <a:ea typeface="SimSun" charset="0"/>
+              <a:cs typeface="Noto Sans SC"/>
+              <a:sym typeface="Noto Sans SC"/>
+            </a:endParaRPr>
+          </a:p>
+          <a:p>
+            <a:pPr marL="0" indent="0" algn="ctr">
+              <a:lnSpc>
+                <a:spcPct val="125000"/>
+              </a:lnSpc>
+              <a:defRPr/>
+            </a:pPr>
+            <a:r>
+              <a:rPr lang="zh-CN" altLang="en-US" sz="2400" b="1" i="0" u="none" strike="noStrike">
+                <a:solidFill>
+                  <a:srgbClr val="FFFFFF"/>
+                </a:solidFill>
+                <a:latin typeface="Noto Sans SC"/>
+                <a:ea typeface="SimSun" charset="0"/>
+                <a:cs typeface="Noto Sans SC"/>
+                <a:sym typeface="Noto Sans SC"/>
+              </a:rPr>
+              <a:t>原理</a:t>
+            </a:r>
+            <a:endParaRPr lang="zh-CN" altLang="en-US" sz="2400" b="1" i="0" u="none" strike="noStrike">
+              <a:solidFill>
+                <a:srgbClr val="FFFFFF"/>
+              </a:solidFill>
+              <a:latin typeface="Noto Sans SC"/>
+              <a:ea typeface="SimSun" charset="0"/>
+              <a:cs typeface="Noto Sans SC"/>
+              <a:sym typeface="Noto Sans SC"/>
+            </a:endParaRPr>
+          </a:p>
+        </p:txBody>
+      </p:sp>
+      <p:sp>
+        <p:nvSpPr>
+          <p:cNvPr id="9" name="AutoShape 6"/>
+          <p:cNvSpPr/>
+          <p:nvPr/>
+        </p:nvSpPr>
+        <p:spPr>
+          <a:xfrm>
+            <a:off x="3395980" y="4530725"/>
+            <a:ext cx="899795" cy="1545590"/>
+          </a:xfrm>
+          <a:prstGeom prst="roundRect">
+            <a:avLst>
+              <a:gd name="adj" fmla="val 0"/>
+            </a:avLst>
+          </a:prstGeom>
+          <a:solidFill>
+            <a:srgbClr val="B388FF">
+              <a:alpha val="8000"/>
+            </a:srgbClr>
+          </a:solidFill>
+          <a:ln w="25400" cap="flat" cmpd="sng">
+            <a:solidFill>
+              <a:srgbClr val="B388FF">
+                <a:alpha val="100000"/>
+              </a:srgbClr>
+            </a:solidFill>
+            <a:prstDash val="solid"/>
+            <a:round/>
+          </a:ln>
+          <a:effectLst>
+            <a:outerShdw blurRad="152400" dir="2700000" algn="tl" rotWithShape="0">
+              <a:srgbClr val="06F0D2">
+                <a:alpha val="40000"/>
+              </a:srgbClr>
+            </a:outerShdw>
+          </a:effectLst>
+        </p:spPr>
+        <p:txBody>
+          <a:bodyPr vert="horz" wrap="square" lIns="0" tIns="0" rIns="0" bIns="0" rtlCol="0" anchor="ctr" anchorCtr="0">
+            <a:noAutofit/>
+          </a:bodyPr>
+          <a:lstStyle/>
+          <a:p>
+            <a:pPr lvl="0" algn="ctr">
+              <a:lnSpc>
+                <a:spcPct val="100000"/>
+              </a:lnSpc>
+              <a:buClrTx/>
+              <a:buSzTx/>
+              <a:buFontTx/>
+              <a:defRPr/>
+            </a:pPr>
+            <a:r>
+              <a:rPr lang="zh-CN" altLang="en-US" sz="2400" b="1">
+                <a:solidFill>
+                  <a:srgbClr val="FFFFFF"/>
+                </a:solidFill>
+                <a:latin typeface="Noto Sans SC"/>
+                <a:ea typeface="SimSun" charset="0"/>
+                <a:cs typeface="Noto Sans SC"/>
+                <a:sym typeface="Noto Sans SC"/>
+              </a:rPr>
+              <a:t>应用</a:t>
+            </a:r>
+            <a:endParaRPr lang="zh-CN" altLang="en-US" sz="2400" b="1">
+              <a:solidFill>
+                <a:srgbClr val="FFFFFF"/>
+              </a:solidFill>
+              <a:latin typeface="Noto Sans SC"/>
+              <a:ea typeface="SimSun" charset="0"/>
+              <a:cs typeface="Noto Sans SC"/>
+              <a:sym typeface="Noto Sans SC"/>
+            </a:endParaRPr>
+          </a:p>
+          <a:p>
+            <a:pPr lvl="0" algn="ctr">
+              <a:lnSpc>
+                <a:spcPct val="100000"/>
+              </a:lnSpc>
+              <a:buClrTx/>
+              <a:buSzTx/>
+              <a:buFontTx/>
+              <a:defRPr/>
+            </a:pPr>
+            <a:r>
+              <a:rPr lang="zh-CN" altLang="en-US" sz="2400" b="1">
+                <a:solidFill>
+                  <a:srgbClr val="FFFFFF"/>
+                </a:solidFill>
+                <a:latin typeface="Noto Sans SC"/>
+                <a:ea typeface="SimSun" charset="0"/>
+                <a:cs typeface="Noto Sans SC"/>
+                <a:sym typeface="Noto Sans SC"/>
+              </a:rPr>
+              <a:t>与智</a:t>
+            </a:r>
+            <a:endParaRPr lang="zh-CN" altLang="en-US" sz="2400" b="1">
+              <a:solidFill>
+                <a:srgbClr val="FFFFFF"/>
+              </a:solidFill>
+              <a:latin typeface="Noto Sans SC"/>
+              <a:ea typeface="SimSun" charset="0"/>
+              <a:cs typeface="Noto Sans SC"/>
+              <a:sym typeface="Noto Sans SC"/>
+            </a:endParaRPr>
+          </a:p>
+          <a:p>
+            <a:pPr lvl="0" algn="ctr">
+              <a:lnSpc>
+                <a:spcPct val="100000"/>
+              </a:lnSpc>
+              <a:buClrTx/>
+              <a:buSzTx/>
+              <a:buFontTx/>
+              <a:defRPr/>
+            </a:pPr>
+            <a:r>
+              <a:rPr lang="zh-CN" altLang="en-US" sz="2400" b="1">
+                <a:solidFill>
+                  <a:srgbClr val="FFFFFF"/>
+                </a:solidFill>
+                <a:latin typeface="Noto Sans SC"/>
+                <a:ea typeface="SimSun" charset="0"/>
+                <a:cs typeface="Noto Sans SC"/>
+                <a:sym typeface="Noto Sans SC"/>
+              </a:rPr>
+              <a:t>能体</a:t>
+            </a:r>
+            <a:endParaRPr lang="zh-CN" altLang="en-US" sz="2400" b="1">
+              <a:solidFill>
+                <a:srgbClr val="FFFFFF"/>
+              </a:solidFill>
+              <a:latin typeface="Noto Sans SC"/>
+              <a:ea typeface="SimSun" charset="0"/>
+              <a:cs typeface="Noto Sans SC"/>
+              <a:sym typeface="Noto Sans SC"/>
+            </a:endParaRPr>
+          </a:p>
+        </p:txBody>
+      </p:sp>
     </p:spTree>
   </p:cSld>
   <p:clrMapOvr>
@@ -14583,7 +14879,7 @@
                                 </p:cTn>
                               </p:par>
                               <p:par>
-                                <p:cTn id="8" presetID="10" presetClass="entr" presetSubtype="0" fill="hold" grpId="0" nodeType="withEffect">
+                                <p:cTn id="8" presetID="10" presetClass="entr" presetSubtype="0" fill="hold" nodeType="withEffect">
                                   <p:stCondLst>
                                     <p:cond delay="0"/>
                                   </p:stCondLst>
@@ -14596,7 +14892,7 @@
                                           </p:stCondLst>
                                         </p:cTn>
                                         <p:tgtEl>
-                                          <p:spTgt spid="5"/>
+                                          <p:spTgt spid="17"/>
                                         </p:tgtEl>
                                         <p:attrNameLst>
                                           <p:attrName>style.visibility</p:attrName>
@@ -14610,7 +14906,7 @@
                                       <p:cBhvr>
                                         <p:cTn id="10" dur="500"/>
                                         <p:tgtEl>
-                                          <p:spTgt spid="5"/>
+                                          <p:spTgt spid="17"/>
                                         </p:tgtEl>
                                       </p:cBhvr>
                                     </p:animEffect>
@@ -14618,7 +14914,7 @@
                                 </p:cTn>
                               </p:par>
                               <p:par>
-                                <p:cTn id="11" presetID="10" presetClass="entr" presetSubtype="0" fill="hold" grpId="0" nodeType="withEffect">
+                                <p:cTn id="11" presetID="10" presetClass="entr" presetSubtype="0" fill="hold" nodeType="withEffect">
                                   <p:stCondLst>
                                     <p:cond delay="0"/>
                                   </p:stCondLst>
@@ -14631,7 +14927,7 @@
                                           </p:stCondLst>
                                         </p:cTn>
                                         <p:tgtEl>
-                                          <p:spTgt spid="7"/>
+                                          <p:spTgt spid="28"/>
                                         </p:tgtEl>
                                         <p:attrNameLst>
                                           <p:attrName>style.visibility</p:attrName>
@@ -14645,7 +14941,7 @@
                                       <p:cBhvr>
                                         <p:cTn id="13" dur="500"/>
                                         <p:tgtEl>
-                                          <p:spTgt spid="7"/>
+                                          <p:spTgt spid="28"/>
                                         </p:tgtEl>
                                       </p:cBhvr>
                                     </p:animEffect>
@@ -14653,7 +14949,7 @@
                                 </p:cTn>
                               </p:par>
                               <p:par>
-                                <p:cTn id="14" presetID="10" presetClass="entr" presetSubtype="0" fill="hold" grpId="0" nodeType="withEffect">
+                                <p:cTn id="14" presetID="10" presetClass="entr" presetSubtype="0" fill="hold" nodeType="withEffect">
                                   <p:stCondLst>
                                     <p:cond delay="0"/>
                                   </p:stCondLst>
@@ -14666,7 +14962,7 @@
                                           </p:stCondLst>
                                         </p:cTn>
                                         <p:tgtEl>
-                                          <p:spTgt spid="8"/>
+                                          <p:spTgt spid="33"/>
                                         </p:tgtEl>
                                         <p:attrNameLst>
                                           <p:attrName>style.visibility</p:attrName>
@@ -14680,7 +14976,7 @@
                                       <p:cBhvr>
                                         <p:cTn id="16" dur="500"/>
                                         <p:tgtEl>
-                                          <p:spTgt spid="8"/>
+                                          <p:spTgt spid="33"/>
                                         </p:tgtEl>
                                       </p:cBhvr>
                                     </p:animEffect>
@@ -14701,7 +14997,7 @@
                                           </p:stCondLst>
                                         </p:cTn>
                                         <p:tgtEl>
-                                          <p:spTgt spid="17"/>
+                                          <p:spTgt spid="38"/>
                                         </p:tgtEl>
                                         <p:attrNameLst>
                                           <p:attrName>style.visibility</p:attrName>
@@ -14715,7 +15011,7 @@
                                       <p:cBhvr>
                                         <p:cTn id="19" dur="500"/>
                                         <p:tgtEl>
-                                          <p:spTgt spid="17"/>
+                                          <p:spTgt spid="38"/>
                                         </p:tgtEl>
                                       </p:cBhvr>
                                     </p:animEffect>
@@ -14736,7 +15032,7 @@
                                           </p:stCondLst>
                                         </p:cTn>
                                         <p:tgtEl>
-                                          <p:spTgt spid="28"/>
+                                          <p:spTgt spid="18"/>
                                         </p:tgtEl>
                                         <p:attrNameLst>
                                           <p:attrName>style.visibility</p:attrName>
@@ -14750,7 +15046,7 @@
                                       <p:cBhvr>
                                         <p:cTn id="22" dur="500"/>
                                         <p:tgtEl>
-                                          <p:spTgt spid="28"/>
+                                          <p:spTgt spid="18"/>
                                         </p:tgtEl>
                                       </p:cBhvr>
                                     </p:animEffect>
@@ -14771,7 +15067,7 @@
                                           </p:stCondLst>
                                         </p:cTn>
                                         <p:tgtEl>
-                                          <p:spTgt spid="33"/>
+                                          <p:spTgt spid="43"/>
                                         </p:tgtEl>
                                         <p:attrNameLst>
                                           <p:attrName>style.visibility</p:attrName>
@@ -14785,7 +15081,7 @@
                                       <p:cBhvr>
                                         <p:cTn id="25" dur="500"/>
                                         <p:tgtEl>
-                                          <p:spTgt spid="33"/>
+                                          <p:spTgt spid="43"/>
                                         </p:tgtEl>
                                       </p:cBhvr>
                                     </p:animEffect>
@@ -14806,7 +15102,7 @@
                                           </p:stCondLst>
                                         </p:cTn>
                                         <p:tgtEl>
-                                          <p:spTgt spid="38"/>
+                                          <p:spTgt spid="23"/>
                                         </p:tgtEl>
                                         <p:attrNameLst>
                                           <p:attrName>style.visibility</p:attrName>
@@ -14820,7 +15116,7 @@
                                       <p:cBhvr>
                                         <p:cTn id="28" dur="500"/>
                                         <p:tgtEl>
-                                          <p:spTgt spid="38"/>
+                                          <p:spTgt spid="23"/>
                                         </p:tgtEl>
                                       </p:cBhvr>
                                     </p:animEffect>
@@ -14841,7 +15137,7 @@
                                           </p:stCondLst>
                                         </p:cTn>
                                         <p:tgtEl>
-                                          <p:spTgt spid="18"/>
+                                          <p:spTgt spid="48"/>
                                         </p:tgtEl>
                                         <p:attrNameLst>
                                           <p:attrName>style.visibility</p:attrName>
@@ -14855,7 +15151,7 @@
                                       <p:cBhvr>
                                         <p:cTn id="31" dur="500"/>
                                         <p:tgtEl>
-                                          <p:spTgt spid="18"/>
+                                          <p:spTgt spid="48"/>
                                         </p:tgtEl>
                                       </p:cBhvr>
                                     </p:animEffect>
@@ -14863,7 +15159,7 @@
                                 </p:cTn>
                               </p:par>
                               <p:par>
-                                <p:cTn id="32" presetID="10" presetClass="entr" presetSubtype="0" fill="hold" nodeType="withEffect">
+                                <p:cTn id="32" presetID="10" presetClass="entr" presetSubtype="0" fill="hold" grpId="0" nodeType="withEffect">
                                   <p:stCondLst>
                                     <p:cond delay="0"/>
                                   </p:stCondLst>
@@ -14876,7 +15172,7 @@
                                           </p:stCondLst>
                                         </p:cTn>
                                         <p:tgtEl>
-                                          <p:spTgt spid="43"/>
+                                          <p:spTgt spid="3"/>
                                         </p:tgtEl>
                                         <p:attrNameLst>
                                           <p:attrName>style.visibility</p:attrName>
@@ -14890,7 +15186,7 @@
                                       <p:cBhvr>
                                         <p:cTn id="34" dur="500"/>
                                         <p:tgtEl>
-                                          <p:spTgt spid="43"/>
+                                          <p:spTgt spid="3"/>
                                         </p:tgtEl>
                                       </p:cBhvr>
                                     </p:animEffect>
@@ -14898,7 +15194,7 @@
                                 </p:cTn>
                               </p:par>
                               <p:par>
-                                <p:cTn id="35" presetID="10" presetClass="entr" presetSubtype="0" fill="hold" nodeType="withEffect">
+                                <p:cTn id="35" presetID="10" presetClass="entr" presetSubtype="0" fill="hold" grpId="0" nodeType="withEffect">
                                   <p:stCondLst>
                                     <p:cond delay="0"/>
                                   </p:stCondLst>
@@ -14911,7 +15207,7 @@
                                           </p:stCondLst>
                                         </p:cTn>
                                         <p:tgtEl>
-                                          <p:spTgt spid="23"/>
+                                          <p:spTgt spid="9"/>
                                         </p:tgtEl>
                                         <p:attrNameLst>
                                           <p:attrName>style.visibility</p:attrName>
@@ -14925,42 +15221,7 @@
                                       <p:cBhvr>
                                         <p:cTn id="37" dur="500"/>
                                         <p:tgtEl>
-                                          <p:spTgt spid="23"/>
-                                        </p:tgtEl>
-                                      </p:cBhvr>
-                                    </p:animEffect>
-                                  </p:childTnLst>
-                                </p:cTn>
-                              </p:par>
-                              <p:par>
-                                <p:cTn id="38" presetID="10" presetClass="entr" presetSubtype="0" fill="hold" nodeType="withEffect">
-                                  <p:stCondLst>
-                                    <p:cond delay="0"/>
-                                  </p:stCondLst>
-                                  <p:childTnLst>
-                                    <p:set>
-                                      <p:cBhvr>
-                                        <p:cTn id="39" dur="1" fill="hold">
-                                          <p:stCondLst>
-                                            <p:cond delay="0"/>
-                                          </p:stCondLst>
-                                        </p:cTn>
-                                        <p:tgtEl>
-                                          <p:spTgt spid="48"/>
-                                        </p:tgtEl>
-                                        <p:attrNameLst>
-                                          <p:attrName>style.visibility</p:attrName>
-                                        </p:attrNameLst>
-                                      </p:cBhvr>
-                                      <p:to>
-                                        <p:strVal val="visible"/>
-                                      </p:to>
-                                    </p:set>
-                                    <p:animEffect transition="in" filter="fade">
-                                      <p:cBhvr>
-                                        <p:cTn id="40" dur="500"/>
-                                        <p:tgtEl>
-                                          <p:spTgt spid="48"/>
+                                          <p:spTgt spid="9"/>
                                         </p:tgtEl>
                                       </p:cBhvr>
                                     </p:animEffect>
@@ -14997,12 +15258,10 @@
     <p:bldLst>
       <p:bldP spid="6" grpId="0" animBg="1"/>
       <p:bldP spid="6" grpId="1" animBg="1"/>
-      <p:bldP spid="5" grpId="0" animBg="1"/>
-      <p:bldP spid="5" grpId="1" animBg="1"/>
-      <p:bldP spid="7" grpId="0" bldLvl="0" animBg="1"/>
-      <p:bldP spid="7" grpId="1" animBg="1"/>
-      <p:bldP spid="8" grpId="0" bldLvl="0" animBg="1"/>
-      <p:bldP spid="8" grpId="1" animBg="1"/>
+      <p:bldP spid="3" grpId="0" bldLvl="0" animBg="1"/>
+      <p:bldP spid="3" grpId="1" animBg="1"/>
+      <p:bldP spid="9" grpId="0" bldLvl="0" animBg="1"/>
+      <p:bldP spid="9" grpId="1" animBg="1"/>
     </p:bldLst>
   </p:timing>
 </p:sld>
@@ -15046,6 +15305,7 @@
               <a:rPr lang="zh-CN" altLang="en-US" dirty="0"/>
               <a:t>大模型的循环工作模式</a:t>
             </a:r>
+            <a:endParaRPr lang="zh-CN" altLang="en-US" dirty="0"/>
           </a:p>
         </p:txBody>
       </p:sp>
@@ -15068,6 +15328,7 @@
               <a:rPr lang="zh-CN" altLang="en-US"/>
               <a:t>发动机的循环：冲程</a:t>
             </a:r>
+            <a:endParaRPr lang="zh-CN" altLang="en-US"/>
           </a:p>
         </p:txBody>
       </p:sp>
@@ -15090,6 +15351,7 @@
               <a:rPr lang="zh-CN" altLang="en-US"/>
               <a:t>大模型的循环：自回归生成</a:t>
             </a:r>
+            <a:endParaRPr lang="zh-CN" altLang="en-US"/>
           </a:p>
         </p:txBody>
       </p:sp>
@@ -15110,7 +15372,6 @@
           <a:p>
             <a:fld id="{49AE70B2-8BF9-45C0-BB95-33D1B9D3A854}" type="slidenum">
               <a:rPr lang="zh-CN" altLang="en-US" smtClean="0"/>
-              <a:t>5</a:t>
             </a:fld>
             <a:endParaRPr lang="en-US" altLang="zh-CN"/>
           </a:p>
@@ -15176,6 +15437,15 @@
               </a:rPr>
               <a:t>初始</a:t>
             </a:r>
+            <a:endParaRPr lang="zh-CN" altLang="en-US" sz="1600" i="0" u="none" strike="noStrike">
+              <a:solidFill>
+                <a:srgbClr val="FFFFFF"/>
+              </a:solidFill>
+              <a:latin typeface="Noto Sans SC"/>
+              <a:ea typeface="SimSun" charset="0"/>
+              <a:cs typeface="Noto Sans SC"/>
+              <a:sym typeface="Noto Sans SC"/>
+            </a:endParaRPr>
           </a:p>
           <a:p>
             <a:pPr marL="0" indent="0" algn="ctr">
@@ -15196,6 +15466,15 @@
               </a:rPr>
               <a:t>文本</a:t>
             </a:r>
+            <a:endParaRPr lang="zh-CN" altLang="en-US" sz="1600" i="0" u="none" strike="noStrike">
+              <a:solidFill>
+                <a:srgbClr val="FFFFFF"/>
+              </a:solidFill>
+              <a:latin typeface="Noto Sans SC"/>
+              <a:ea typeface="SimSun" charset="0"/>
+              <a:cs typeface="Noto Sans SC"/>
+              <a:sym typeface="Noto Sans SC"/>
+            </a:endParaRPr>
           </a:p>
         </p:txBody>
       </p:sp>
@@ -15373,6 +15652,15 @@
               </a:rPr>
               <a:t>输入</a:t>
             </a:r>
+            <a:endParaRPr lang="zh-CN" sz="1600" i="0" u="none" strike="noStrike">
+              <a:solidFill>
+                <a:srgbClr val="FFFFFF"/>
+              </a:solidFill>
+              <a:latin typeface="Noto Sans SC"/>
+              <a:ea typeface="SimSun" charset="0"/>
+              <a:cs typeface="Noto Sans SC"/>
+              <a:sym typeface="Noto Sans SC"/>
+            </a:endParaRPr>
           </a:p>
           <a:p>
             <a:pPr marL="0" indent="0" algn="ctr">
@@ -15393,6 +15681,15 @@
               </a:rPr>
               <a:t>文本</a:t>
             </a:r>
+            <a:endParaRPr lang="zh-CN" sz="1600" i="0" u="none" strike="noStrike">
+              <a:solidFill>
+                <a:srgbClr val="FFFFFF"/>
+              </a:solidFill>
+              <a:latin typeface="Noto Sans SC"/>
+              <a:ea typeface="SimSun" charset="0"/>
+              <a:cs typeface="Noto Sans SC"/>
+              <a:sym typeface="Noto Sans SC"/>
+            </a:endParaRPr>
           </a:p>
         </p:txBody>
       </p:sp>
@@ -15456,6 +15753,15 @@
               </a:rPr>
               <a:t>后续</a:t>
             </a:r>
+            <a:endParaRPr lang="zh-CN" sz="1600" i="0" u="none" strike="noStrike">
+              <a:solidFill>
+                <a:schemeClr val="bg1"/>
+              </a:solidFill>
+              <a:latin typeface="Noto Sans SC"/>
+              <a:ea typeface="SimSun" charset="0"/>
+              <a:cs typeface="Noto Sans SC"/>
+              <a:sym typeface="+mn-ea"/>
+            </a:endParaRPr>
           </a:p>
           <a:p>
             <a:pPr indent="0" algn="ctr" fontAlgn="auto">
@@ -15476,6 +15782,15 @@
               </a:rPr>
               <a:t>文本</a:t>
             </a:r>
+            <a:endParaRPr lang="zh-CN" sz="1600" i="0" u="none" strike="noStrike">
+              <a:solidFill>
+                <a:schemeClr val="bg1"/>
+              </a:solidFill>
+              <a:latin typeface="Noto Sans SC"/>
+              <a:ea typeface="SimSun" charset="0"/>
+              <a:cs typeface="Noto Sans SC"/>
+              <a:sym typeface="+mn-ea"/>
+            </a:endParaRPr>
           </a:p>
         </p:txBody>
       </p:sp>
@@ -15562,6 +15877,11 @@
                 </a:rPr>
                 <a:t>+</a:t>
               </a:r>
+              <a:endParaRPr lang="en-US" altLang="zh-CN">
+                <a:solidFill>
+                  <a:srgbClr val="69F0AE"/>
+                </a:solidFill>
+              </a:endParaRPr>
             </a:p>
           </p:txBody>
         </p:sp>
@@ -15626,6 +15946,15 @@
               </a:rPr>
               <a:t>大</a:t>
             </a:r>
+            <a:endParaRPr lang="zh-CN" altLang="en-US" sz="2000" b="1" i="0" u="none" strike="noStrike">
+              <a:solidFill>
+                <a:srgbClr val="FFFFFF"/>
+              </a:solidFill>
+              <a:latin typeface="Noto Sans SC"/>
+              <a:ea typeface="SimSun" charset="0"/>
+              <a:cs typeface="Noto Sans SC"/>
+              <a:sym typeface="Noto Sans SC"/>
+            </a:endParaRPr>
           </a:p>
           <a:p>
             <a:pPr marL="0" indent="0" algn="ctr">
@@ -15646,6 +15975,15 @@
               </a:rPr>
               <a:t>模</a:t>
             </a:r>
+            <a:endParaRPr lang="zh-CN" altLang="en-US" sz="2000" b="1" i="0" u="none" strike="noStrike">
+              <a:solidFill>
+                <a:srgbClr val="FFFFFF"/>
+              </a:solidFill>
+              <a:latin typeface="Noto Sans SC"/>
+              <a:ea typeface="SimSun" charset="0"/>
+              <a:cs typeface="Noto Sans SC"/>
+              <a:sym typeface="Noto Sans SC"/>
+            </a:endParaRPr>
           </a:p>
           <a:p>
             <a:pPr marL="0" indent="0" algn="ctr">
@@ -15666,6 +16004,15 @@
               </a:rPr>
               <a:t>型</a:t>
             </a:r>
+            <a:endParaRPr lang="zh-CN" altLang="en-US" sz="2000" b="1" i="0" u="none" strike="noStrike">
+              <a:solidFill>
+                <a:srgbClr val="FFFFFF"/>
+              </a:solidFill>
+              <a:latin typeface="Noto Sans SC"/>
+              <a:ea typeface="SimSun" charset="0"/>
+              <a:cs typeface="Noto Sans SC"/>
+              <a:sym typeface="Noto Sans SC"/>
+            </a:endParaRPr>
           </a:p>
         </p:txBody>
       </p:sp>
@@ -15678,7 +16025,7 @@
           <p:nvPr/>
         </p:nvPicPr>
         <p:blipFill>
-          <a:blip r:embed="rId3"/>
+          <a:blip r:embed="rId1"/>
           <a:stretch>
             <a:fillRect/>
           </a:stretch>
@@ -15695,13 +16042,7 @@
       </p:pic>
       <p:sp>
         <p:nvSpPr>
-          <p:cNvPr id="2" name="AutoShape 6">
-            <a:extLst>
-              <a:ext uri="{FF2B5EF4-FFF2-40B4-BE49-F238E27FC236}">
-                <a16:creationId xmlns:a16="http://schemas.microsoft.com/office/drawing/2014/main" id="{486E7393-F926-899E-24E2-E7AFEC5349D5}"/>
-              </a:ext>
-            </a:extLst>
-          </p:cNvPr>
+          <p:cNvPr id="2" name="AutoShape 6"/>
           <p:cNvSpPr/>
           <p:nvPr/>
         </p:nvSpPr>
@@ -15788,18 +16129,21 @@
               </a:rPr>
               <a:t>文本</a:t>
             </a:r>
+            <a:endParaRPr lang="zh-CN" altLang="en-US" sz="1600" i="0" u="none" strike="noStrike" dirty="0">
+              <a:solidFill>
+                <a:srgbClr val="FFFFFF"/>
+              </a:solidFill>
+              <a:latin typeface="Noto Sans SC"/>
+              <a:ea typeface="SimSun" charset="0"/>
+              <a:cs typeface="Noto Sans SC"/>
+              <a:sym typeface="Noto Sans SC"/>
+            </a:endParaRPr>
           </a:p>
         </p:txBody>
       </p:sp>
       <p:cxnSp>
         <p:nvCxnSpPr>
-          <p:cNvPr id="3" name="直接箭头连接符 2">
-            <a:extLst>
-              <a:ext uri="{FF2B5EF4-FFF2-40B4-BE49-F238E27FC236}">
-                <a16:creationId xmlns:a16="http://schemas.microsoft.com/office/drawing/2014/main" id="{5C2CAA96-105E-153D-69D0-42A2B59AE4FE}"/>
-              </a:ext>
-            </a:extLst>
-          </p:cNvPr>
+          <p:cNvPr id="3" name="直接箭头连接符 2"/>
           <p:cNvCxnSpPr/>
           <p:nvPr/>
         </p:nvCxnSpPr>
@@ -16595,6 +16939,7 @@
               <a:rPr lang="zh-CN" altLang="en-US" sz="3200" dirty="0"/>
               <a:t>示例</a:t>
             </a:r>
+            <a:endParaRPr lang="zh-CN" altLang="en-US" sz="3200" dirty="0"/>
           </a:p>
         </p:txBody>
       </p:sp>
@@ -16615,7 +16960,6 @@
           <a:p>
             <a:fld id="{49AE70B2-8BF9-45C0-BB95-33D1B9D3A854}" type="slidenum">
               <a:rPr lang="zh-CN" altLang="en-US" smtClean="0"/>
-              <a:t>6</a:t>
             </a:fld>
             <a:endParaRPr lang="en-US" altLang="zh-CN"/>
           </a:p>
@@ -16638,69 +16982,15 @@
                 <a:tableStyleId>{5C22544A-7EE6-4342-B048-85BDC9FD1C3A}</a:tableStyleId>
               </a:tblPr>
               <a:tblGrid>
-                <a:gridCol w="1013460">
-                  <a:extLst>
-                    <a:ext uri="{9D8B030D-6E8A-4147-A177-3AD203B41FA5}">
-                      <a16:colId xmlns:a16="http://schemas.microsoft.com/office/drawing/2014/main" val="20000"/>
-                    </a:ext>
-                  </a:extLst>
-                </a:gridCol>
-                <a:gridCol w="1013460">
-                  <a:extLst>
-                    <a:ext uri="{9D8B030D-6E8A-4147-A177-3AD203B41FA5}">
-                      <a16:colId xmlns:a16="http://schemas.microsoft.com/office/drawing/2014/main" val="20001"/>
-                    </a:ext>
-                  </a:extLst>
-                </a:gridCol>
-                <a:gridCol w="1013460">
-                  <a:extLst>
-                    <a:ext uri="{9D8B030D-6E8A-4147-A177-3AD203B41FA5}">
-                      <a16:colId xmlns:a16="http://schemas.microsoft.com/office/drawing/2014/main" val="20002"/>
-                    </a:ext>
-                  </a:extLst>
-                </a:gridCol>
-                <a:gridCol w="1013460">
-                  <a:extLst>
-                    <a:ext uri="{9D8B030D-6E8A-4147-A177-3AD203B41FA5}">
-                      <a16:colId xmlns:a16="http://schemas.microsoft.com/office/drawing/2014/main" val="20003"/>
-                    </a:ext>
-                  </a:extLst>
-                </a:gridCol>
-                <a:gridCol w="1013460">
-                  <a:extLst>
-                    <a:ext uri="{9D8B030D-6E8A-4147-A177-3AD203B41FA5}">
-                      <a16:colId xmlns:a16="http://schemas.microsoft.com/office/drawing/2014/main" val="20004"/>
-                    </a:ext>
-                  </a:extLst>
-                </a:gridCol>
-                <a:gridCol w="1013460">
-                  <a:extLst>
-                    <a:ext uri="{9D8B030D-6E8A-4147-A177-3AD203B41FA5}">
-                      <a16:colId xmlns:a16="http://schemas.microsoft.com/office/drawing/2014/main" val="20005"/>
-                    </a:ext>
-                  </a:extLst>
-                </a:gridCol>
-                <a:gridCol w="1013460">
-                  <a:extLst>
-                    <a:ext uri="{9D8B030D-6E8A-4147-A177-3AD203B41FA5}">
-                      <a16:colId xmlns:a16="http://schemas.microsoft.com/office/drawing/2014/main" val="20006"/>
-                    </a:ext>
-                  </a:extLst>
-                </a:gridCol>
-                <a:gridCol w="1013460">
-                  <a:extLst>
-                    <a:ext uri="{9D8B030D-6E8A-4147-A177-3AD203B41FA5}">
-                      <a16:colId xmlns:a16="http://schemas.microsoft.com/office/drawing/2014/main" val="20007"/>
-                    </a:ext>
-                  </a:extLst>
-                </a:gridCol>
-                <a:gridCol w="1013460">
-                  <a:extLst>
-                    <a:ext uri="{9D8B030D-6E8A-4147-A177-3AD203B41FA5}">
-                      <a16:colId xmlns:a16="http://schemas.microsoft.com/office/drawing/2014/main" val="20008"/>
-                    </a:ext>
-                  </a:extLst>
-                </a:gridCol>
+                <a:gridCol w="1013460"/>
+                <a:gridCol w="1013460"/>
+                <a:gridCol w="1013460"/>
+                <a:gridCol w="1013460"/>
+                <a:gridCol w="1013460"/>
+                <a:gridCol w="1013460"/>
+                <a:gridCol w="1013460"/>
+                <a:gridCol w="1013460"/>
+                <a:gridCol w="1013460"/>
               </a:tblGrid>
               <a:tr h="381000">
                 <a:tc>
@@ -16715,6 +17005,7 @@
                         <a:rPr lang="zh-CN" altLang="en-US"/>
                         <a:t>港科大</a:t>
                       </a:r>
+                      <a:endParaRPr lang="zh-CN" altLang="en-US"/>
                     </a:p>
                   </a:txBody>
                   <a:tcPr anchor="ctr">
@@ -16757,6 +17048,7 @@
                         <a:rPr lang="zh-CN" altLang="en-US"/>
                         <a:t>在</a:t>
                       </a:r>
+                      <a:endParaRPr lang="zh-CN" altLang="en-US"/>
                     </a:p>
                   </a:txBody>
                   <a:tcPr anchor="ctr">
@@ -16799,6 +17091,7 @@
                         <a:rPr lang="zh-CN" altLang="en-US"/>
                         <a:t>今年</a:t>
                       </a:r>
+                      <a:endParaRPr lang="zh-CN" altLang="en-US"/>
                     </a:p>
                   </a:txBody>
                   <a:tcPr anchor="ctr">
@@ -16841,6 +17134,7 @@
                         <a:rPr lang="zh-CN" altLang="en-US"/>
                         <a:t>排名</a:t>
                       </a:r>
+                      <a:endParaRPr lang="zh-CN" altLang="en-US"/>
                     </a:p>
                   </a:txBody>
                   <a:tcPr anchor="ctr">
@@ -16883,6 +17177,7 @@
                         <a:rPr lang="zh-CN" altLang="en-US"/>
                         <a:t>第</a:t>
                       </a:r>
+                      <a:endParaRPr lang="zh-CN" altLang="en-US"/>
                     </a:p>
                   </a:txBody>
                   <a:tcPr anchor="ctr">
@@ -16925,6 +17220,7 @@
                         <a:rPr lang="en-US" altLang="zh-CN"/>
                         <a:t>33</a:t>
                       </a:r>
+                      <a:endParaRPr lang="en-US" altLang="zh-CN"/>
                     </a:p>
                   </a:txBody>
                   <a:tcPr anchor="ctr">
@@ -16967,6 +17263,7 @@
                         <a:rPr lang="zh-CN" altLang="en-US"/>
                         <a:t>位</a:t>
                       </a:r>
+                      <a:endParaRPr lang="zh-CN" altLang="en-US"/>
                     </a:p>
                   </a:txBody>
                   <a:tcPr anchor="ctr">
@@ -17009,6 +17306,7 @@
                         <a:rPr lang="zh-CN" altLang="en-US"/>
                         <a:t>。</a:t>
                       </a:r>
+                      <a:endParaRPr lang="zh-CN" altLang="en-US"/>
                     </a:p>
                   </a:txBody>
                   <a:tcPr anchor="ctr">
@@ -17082,11 +17380,6 @@
                     <a:noFill/>
                   </a:tcPr>
                 </a:tc>
-                <a:extLst>
-                  <a:ext uri="{0D108BD9-81ED-4DB2-BD59-A6C34878D82A}">
-                    <a16:rowId xmlns:a16="http://schemas.microsoft.com/office/drawing/2014/main" val="10000"/>
-                  </a:ext>
-                </a:extLst>
               </a:tr>
             </a:tbl>
           </a:graphicData>
@@ -17109,34 +17402,10 @@
                 <a:tableStyleId>{5C22544A-7EE6-4342-B048-85BDC9FD1C3A}</a:tableStyleId>
               </a:tblPr>
               <a:tblGrid>
-                <a:gridCol w="1013460">
-                  <a:extLst>
-                    <a:ext uri="{9D8B030D-6E8A-4147-A177-3AD203B41FA5}">
-                      <a16:colId xmlns:a16="http://schemas.microsoft.com/office/drawing/2014/main" val="20000"/>
-                    </a:ext>
-                  </a:extLst>
-                </a:gridCol>
-                <a:gridCol w="1013460">
-                  <a:extLst>
-                    <a:ext uri="{9D8B030D-6E8A-4147-A177-3AD203B41FA5}">
-                      <a16:colId xmlns:a16="http://schemas.microsoft.com/office/drawing/2014/main" val="20001"/>
-                    </a:ext>
-                  </a:extLst>
-                </a:gridCol>
-                <a:gridCol w="1013460">
-                  <a:extLst>
-                    <a:ext uri="{9D8B030D-6E8A-4147-A177-3AD203B41FA5}">
-                      <a16:colId xmlns:a16="http://schemas.microsoft.com/office/drawing/2014/main" val="20002"/>
-                    </a:ext>
-                  </a:extLst>
-                </a:gridCol>
-                <a:gridCol w="1013460">
-                  <a:extLst>
-                    <a:ext uri="{9D8B030D-6E8A-4147-A177-3AD203B41FA5}">
-                      <a16:colId xmlns:a16="http://schemas.microsoft.com/office/drawing/2014/main" val="20003"/>
-                    </a:ext>
-                  </a:extLst>
-                </a:gridCol>
+                <a:gridCol w="1013460"/>
+                <a:gridCol w="1013460"/>
+                <a:gridCol w="1013460"/>
+                <a:gridCol w="1013460"/>
               </a:tblGrid>
               <a:tr h="381000">
                 <a:tc>
@@ -17151,6 +17420,7 @@
                         <a:rPr lang="zh-CN" altLang="en-US"/>
                         <a:t>港科大</a:t>
                       </a:r>
+                      <a:endParaRPr lang="zh-CN" altLang="en-US"/>
                     </a:p>
                   </a:txBody>
                   <a:tcPr anchor="ctr">
@@ -17193,6 +17463,7 @@
                         <a:rPr lang="zh-CN" altLang="en-US"/>
                         <a:t>在</a:t>
                       </a:r>
+                      <a:endParaRPr lang="zh-CN" altLang="en-US"/>
                     </a:p>
                   </a:txBody>
                   <a:tcPr anchor="ctr">
@@ -17235,6 +17506,7 @@
                         <a:rPr lang="zh-CN" altLang="en-US"/>
                         <a:t>今年</a:t>
                       </a:r>
+                      <a:endParaRPr lang="zh-CN" altLang="en-US"/>
                     </a:p>
                   </a:txBody>
                   <a:tcPr anchor="ctr">
@@ -17308,11 +17580,6 @@
                     <a:noFill/>
                   </a:tcPr>
                 </a:tc>
-                <a:extLst>
-                  <a:ext uri="{0D108BD9-81ED-4DB2-BD59-A6C34878D82A}">
-                    <a16:rowId xmlns:a16="http://schemas.microsoft.com/office/drawing/2014/main" val="10000"/>
-                  </a:ext>
-                </a:extLst>
               </a:tr>
             </a:tbl>
           </a:graphicData>
@@ -17335,41 +17602,11 @@
                 <a:tableStyleId>{5C22544A-7EE6-4342-B048-85BDC9FD1C3A}</a:tableStyleId>
               </a:tblPr>
               <a:tblGrid>
-                <a:gridCol w="1013460">
-                  <a:extLst>
-                    <a:ext uri="{9D8B030D-6E8A-4147-A177-3AD203B41FA5}">
-                      <a16:colId xmlns:a16="http://schemas.microsoft.com/office/drawing/2014/main" val="20000"/>
-                    </a:ext>
-                  </a:extLst>
-                </a:gridCol>
-                <a:gridCol w="1013460">
-                  <a:extLst>
-                    <a:ext uri="{9D8B030D-6E8A-4147-A177-3AD203B41FA5}">
-                      <a16:colId xmlns:a16="http://schemas.microsoft.com/office/drawing/2014/main" val="20001"/>
-                    </a:ext>
-                  </a:extLst>
-                </a:gridCol>
-                <a:gridCol w="1013460">
-                  <a:extLst>
-                    <a:ext uri="{9D8B030D-6E8A-4147-A177-3AD203B41FA5}">
-                      <a16:colId xmlns:a16="http://schemas.microsoft.com/office/drawing/2014/main" val="20002"/>
-                    </a:ext>
-                  </a:extLst>
-                </a:gridCol>
-                <a:gridCol w="1013460">
-                  <a:extLst>
-                    <a:ext uri="{9D8B030D-6E8A-4147-A177-3AD203B41FA5}">
-                      <a16:colId xmlns:a16="http://schemas.microsoft.com/office/drawing/2014/main" val="20003"/>
-                    </a:ext>
-                  </a:extLst>
-                </a:gridCol>
-                <a:gridCol w="1013460">
-                  <a:extLst>
-                    <a:ext uri="{9D8B030D-6E8A-4147-A177-3AD203B41FA5}">
-                      <a16:colId xmlns:a16="http://schemas.microsoft.com/office/drawing/2014/main" val="20004"/>
-                    </a:ext>
-                  </a:extLst>
-                </a:gridCol>
+                <a:gridCol w="1013460"/>
+                <a:gridCol w="1013460"/>
+                <a:gridCol w="1013460"/>
+                <a:gridCol w="1013460"/>
+                <a:gridCol w="1013460"/>
               </a:tblGrid>
               <a:tr h="381000">
                 <a:tc>
@@ -17384,6 +17621,7 @@
                         <a:rPr lang="zh-CN" altLang="en-US"/>
                         <a:t>港科大</a:t>
                       </a:r>
+                      <a:endParaRPr lang="zh-CN" altLang="en-US"/>
                     </a:p>
                   </a:txBody>
                   <a:tcPr anchor="ctr">
@@ -17426,6 +17664,7 @@
                         <a:rPr lang="zh-CN" altLang="en-US"/>
                         <a:t>在</a:t>
                       </a:r>
+                      <a:endParaRPr lang="zh-CN" altLang="en-US"/>
                     </a:p>
                   </a:txBody>
                   <a:tcPr anchor="ctr">
@@ -17468,6 +17707,7 @@
                         <a:rPr lang="zh-CN" altLang="en-US"/>
                         <a:t>今年</a:t>
                       </a:r>
+                      <a:endParaRPr lang="zh-CN" altLang="en-US"/>
                     </a:p>
                   </a:txBody>
                   <a:tcPr anchor="ctr">
@@ -17510,6 +17750,7 @@
                         <a:rPr lang="zh-CN" altLang="en-US"/>
                         <a:t>排名</a:t>
                       </a:r>
+                      <a:endParaRPr lang="zh-CN" altLang="en-US"/>
                     </a:p>
                   </a:txBody>
                   <a:tcPr anchor="ctr">
@@ -17583,11 +17824,6 @@
                     <a:noFill/>
                   </a:tcPr>
                 </a:tc>
-                <a:extLst>
-                  <a:ext uri="{0D108BD9-81ED-4DB2-BD59-A6C34878D82A}">
-                    <a16:rowId xmlns:a16="http://schemas.microsoft.com/office/drawing/2014/main" val="10000"/>
-                  </a:ext>
-                </a:extLst>
               </a:tr>
             </a:tbl>
           </a:graphicData>
@@ -17610,48 +17846,12 @@
                 <a:tableStyleId>{5C22544A-7EE6-4342-B048-85BDC9FD1C3A}</a:tableStyleId>
               </a:tblPr>
               <a:tblGrid>
-                <a:gridCol w="1013460">
-                  <a:extLst>
-                    <a:ext uri="{9D8B030D-6E8A-4147-A177-3AD203B41FA5}">
-                      <a16:colId xmlns:a16="http://schemas.microsoft.com/office/drawing/2014/main" val="20000"/>
-                    </a:ext>
-                  </a:extLst>
-                </a:gridCol>
-                <a:gridCol w="1013460">
-                  <a:extLst>
-                    <a:ext uri="{9D8B030D-6E8A-4147-A177-3AD203B41FA5}">
-                      <a16:colId xmlns:a16="http://schemas.microsoft.com/office/drawing/2014/main" val="20001"/>
-                    </a:ext>
-                  </a:extLst>
-                </a:gridCol>
-                <a:gridCol w="1013460">
-                  <a:extLst>
-                    <a:ext uri="{9D8B030D-6E8A-4147-A177-3AD203B41FA5}">
-                      <a16:colId xmlns:a16="http://schemas.microsoft.com/office/drawing/2014/main" val="20002"/>
-                    </a:ext>
-                  </a:extLst>
-                </a:gridCol>
-                <a:gridCol w="1013460">
-                  <a:extLst>
-                    <a:ext uri="{9D8B030D-6E8A-4147-A177-3AD203B41FA5}">
-                      <a16:colId xmlns:a16="http://schemas.microsoft.com/office/drawing/2014/main" val="20003"/>
-                    </a:ext>
-                  </a:extLst>
-                </a:gridCol>
-                <a:gridCol w="1013460">
-                  <a:extLst>
-                    <a:ext uri="{9D8B030D-6E8A-4147-A177-3AD203B41FA5}">
-                      <a16:colId xmlns:a16="http://schemas.microsoft.com/office/drawing/2014/main" val="20004"/>
-                    </a:ext>
-                  </a:extLst>
-                </a:gridCol>
-                <a:gridCol w="1013460">
-                  <a:extLst>
-                    <a:ext uri="{9D8B030D-6E8A-4147-A177-3AD203B41FA5}">
-                      <a16:colId xmlns:a16="http://schemas.microsoft.com/office/drawing/2014/main" val="20005"/>
-                    </a:ext>
-                  </a:extLst>
-                </a:gridCol>
+                <a:gridCol w="1013460"/>
+                <a:gridCol w="1013460"/>
+                <a:gridCol w="1013460"/>
+                <a:gridCol w="1013460"/>
+                <a:gridCol w="1013460"/>
+                <a:gridCol w="1013460"/>
               </a:tblGrid>
               <a:tr h="381000">
                 <a:tc>
@@ -17666,6 +17866,7 @@
                         <a:rPr lang="zh-CN" altLang="en-US"/>
                         <a:t>港科大</a:t>
                       </a:r>
+                      <a:endParaRPr lang="zh-CN" altLang="en-US"/>
                     </a:p>
                   </a:txBody>
                   <a:tcPr anchor="ctr">
@@ -17708,6 +17909,7 @@
                         <a:rPr lang="zh-CN" altLang="en-US"/>
                         <a:t>在</a:t>
                       </a:r>
+                      <a:endParaRPr lang="zh-CN" altLang="en-US"/>
                     </a:p>
                   </a:txBody>
                   <a:tcPr anchor="ctr">
@@ -17750,6 +17952,7 @@
                         <a:rPr lang="zh-CN" altLang="en-US"/>
                         <a:t>今年</a:t>
                       </a:r>
+                      <a:endParaRPr lang="zh-CN" altLang="en-US"/>
                     </a:p>
                   </a:txBody>
                   <a:tcPr anchor="ctr">
@@ -17792,6 +17995,7 @@
                         <a:rPr lang="zh-CN" altLang="en-US"/>
                         <a:t>排名</a:t>
                       </a:r>
+                      <a:endParaRPr lang="zh-CN" altLang="en-US"/>
                     </a:p>
                   </a:txBody>
                   <a:tcPr anchor="ctr">
@@ -17834,6 +18038,7 @@
                         <a:rPr lang="zh-CN" altLang="en-US"/>
                         <a:t>第</a:t>
                       </a:r>
+                      <a:endParaRPr lang="zh-CN" altLang="en-US"/>
                     </a:p>
                   </a:txBody>
                   <a:tcPr anchor="ctr">
@@ -17907,11 +18112,6 @@
                     <a:noFill/>
                   </a:tcPr>
                 </a:tc>
-                <a:extLst>
-                  <a:ext uri="{0D108BD9-81ED-4DB2-BD59-A6C34878D82A}">
-                    <a16:rowId xmlns:a16="http://schemas.microsoft.com/office/drawing/2014/main" val="10000"/>
-                  </a:ext>
-                </a:extLst>
               </a:tr>
             </a:tbl>
           </a:graphicData>
@@ -17934,55 +18134,13 @@
                 <a:tableStyleId>{5C22544A-7EE6-4342-B048-85BDC9FD1C3A}</a:tableStyleId>
               </a:tblPr>
               <a:tblGrid>
-                <a:gridCol w="1013460">
-                  <a:extLst>
-                    <a:ext uri="{9D8B030D-6E8A-4147-A177-3AD203B41FA5}">
-                      <a16:colId xmlns:a16="http://schemas.microsoft.com/office/drawing/2014/main" val="20000"/>
-                    </a:ext>
-                  </a:extLst>
-                </a:gridCol>
-                <a:gridCol w="1013460">
-                  <a:extLst>
-                    <a:ext uri="{9D8B030D-6E8A-4147-A177-3AD203B41FA5}">
-                      <a16:colId xmlns:a16="http://schemas.microsoft.com/office/drawing/2014/main" val="20001"/>
-                    </a:ext>
-                  </a:extLst>
-                </a:gridCol>
-                <a:gridCol w="1013460">
-                  <a:extLst>
-                    <a:ext uri="{9D8B030D-6E8A-4147-A177-3AD203B41FA5}">
-                      <a16:colId xmlns:a16="http://schemas.microsoft.com/office/drawing/2014/main" val="20002"/>
-                    </a:ext>
-                  </a:extLst>
-                </a:gridCol>
-                <a:gridCol w="1013460">
-                  <a:extLst>
-                    <a:ext uri="{9D8B030D-6E8A-4147-A177-3AD203B41FA5}">
-                      <a16:colId xmlns:a16="http://schemas.microsoft.com/office/drawing/2014/main" val="20003"/>
-                    </a:ext>
-                  </a:extLst>
-                </a:gridCol>
-                <a:gridCol w="1013460">
-                  <a:extLst>
-                    <a:ext uri="{9D8B030D-6E8A-4147-A177-3AD203B41FA5}">
-                      <a16:colId xmlns:a16="http://schemas.microsoft.com/office/drawing/2014/main" val="20004"/>
-                    </a:ext>
-                  </a:extLst>
-                </a:gridCol>
-                <a:gridCol w="1013460">
-                  <a:extLst>
-                    <a:ext uri="{9D8B030D-6E8A-4147-A177-3AD203B41FA5}">
-                      <a16:colId xmlns:a16="http://schemas.microsoft.com/office/drawing/2014/main" val="20005"/>
-                    </a:ext>
-                  </a:extLst>
-                </a:gridCol>
-                <a:gridCol w="1013460">
-                  <a:extLst>
-                    <a:ext uri="{9D8B030D-6E8A-4147-A177-3AD203B41FA5}">
-                      <a16:colId xmlns:a16="http://schemas.microsoft.com/office/drawing/2014/main" val="20006"/>
-                    </a:ext>
-                  </a:extLst>
-                </a:gridCol>
+                <a:gridCol w="1013460"/>
+                <a:gridCol w="1013460"/>
+                <a:gridCol w="1013460"/>
+                <a:gridCol w="1013460"/>
+                <a:gridCol w="1013460"/>
+                <a:gridCol w="1013460"/>
+                <a:gridCol w="1013460"/>
               </a:tblGrid>
               <a:tr h="381000">
                 <a:tc>
@@ -17997,6 +18155,7 @@
                         <a:rPr lang="zh-CN" altLang="en-US"/>
                         <a:t>港科大</a:t>
                       </a:r>
+                      <a:endParaRPr lang="zh-CN" altLang="en-US"/>
                     </a:p>
                   </a:txBody>
                   <a:tcPr anchor="ctr">
@@ -18039,6 +18198,7 @@
                         <a:rPr lang="zh-CN" altLang="en-US"/>
                         <a:t>在</a:t>
                       </a:r>
+                      <a:endParaRPr lang="zh-CN" altLang="en-US"/>
                     </a:p>
                   </a:txBody>
                   <a:tcPr anchor="ctr">
@@ -18081,6 +18241,7 @@
                         <a:rPr lang="zh-CN" altLang="en-US"/>
                         <a:t>今年</a:t>
                       </a:r>
+                      <a:endParaRPr lang="zh-CN" altLang="en-US"/>
                     </a:p>
                   </a:txBody>
                   <a:tcPr anchor="ctr">
@@ -18123,6 +18284,7 @@
                         <a:rPr lang="zh-CN" altLang="en-US"/>
                         <a:t>排名</a:t>
                       </a:r>
+                      <a:endParaRPr lang="zh-CN" altLang="en-US"/>
                     </a:p>
                   </a:txBody>
                   <a:tcPr anchor="ctr">
@@ -18165,6 +18327,7 @@
                         <a:rPr lang="zh-CN" altLang="en-US"/>
                         <a:t>第</a:t>
                       </a:r>
+                      <a:endParaRPr lang="zh-CN" altLang="en-US"/>
                     </a:p>
                   </a:txBody>
                   <a:tcPr anchor="ctr">
@@ -18207,6 +18370,7 @@
                         <a:rPr lang="en-US" altLang="zh-CN"/>
                         <a:t>33</a:t>
                       </a:r>
+                      <a:endParaRPr lang="en-US" altLang="zh-CN"/>
                     </a:p>
                   </a:txBody>
                   <a:tcPr anchor="ctr">
@@ -18280,11 +18444,6 @@
                     <a:noFill/>
                   </a:tcPr>
                 </a:tc>
-                <a:extLst>
-                  <a:ext uri="{0D108BD9-81ED-4DB2-BD59-A6C34878D82A}">
-                    <a16:rowId xmlns:a16="http://schemas.microsoft.com/office/drawing/2014/main" val="10000"/>
-                  </a:ext>
-                </a:extLst>
               </a:tr>
             </a:tbl>
           </a:graphicData>
@@ -18307,62 +18466,14 @@
                 <a:tableStyleId>{5C22544A-7EE6-4342-B048-85BDC9FD1C3A}</a:tableStyleId>
               </a:tblPr>
               <a:tblGrid>
-                <a:gridCol w="1013460">
-                  <a:extLst>
-                    <a:ext uri="{9D8B030D-6E8A-4147-A177-3AD203B41FA5}">
-                      <a16:colId xmlns:a16="http://schemas.microsoft.com/office/drawing/2014/main" val="20000"/>
-                    </a:ext>
-                  </a:extLst>
-                </a:gridCol>
-                <a:gridCol w="1013460">
-                  <a:extLst>
-                    <a:ext uri="{9D8B030D-6E8A-4147-A177-3AD203B41FA5}">
-                      <a16:colId xmlns:a16="http://schemas.microsoft.com/office/drawing/2014/main" val="20001"/>
-                    </a:ext>
-                  </a:extLst>
-                </a:gridCol>
-                <a:gridCol w="1013460">
-                  <a:extLst>
-                    <a:ext uri="{9D8B030D-6E8A-4147-A177-3AD203B41FA5}">
-                      <a16:colId xmlns:a16="http://schemas.microsoft.com/office/drawing/2014/main" val="20002"/>
-                    </a:ext>
-                  </a:extLst>
-                </a:gridCol>
-                <a:gridCol w="1013460">
-                  <a:extLst>
-                    <a:ext uri="{9D8B030D-6E8A-4147-A177-3AD203B41FA5}">
-                      <a16:colId xmlns:a16="http://schemas.microsoft.com/office/drawing/2014/main" val="20003"/>
-                    </a:ext>
-                  </a:extLst>
-                </a:gridCol>
-                <a:gridCol w="1013460">
-                  <a:extLst>
-                    <a:ext uri="{9D8B030D-6E8A-4147-A177-3AD203B41FA5}">
-                      <a16:colId xmlns:a16="http://schemas.microsoft.com/office/drawing/2014/main" val="20004"/>
-                    </a:ext>
-                  </a:extLst>
-                </a:gridCol>
-                <a:gridCol w="1013460">
-                  <a:extLst>
-                    <a:ext uri="{9D8B030D-6E8A-4147-A177-3AD203B41FA5}">
-                      <a16:colId xmlns:a16="http://schemas.microsoft.com/office/drawing/2014/main" val="20005"/>
-                    </a:ext>
-                  </a:extLst>
-                </a:gridCol>
-                <a:gridCol w="1013460">
-                  <a:extLst>
-                    <a:ext uri="{9D8B030D-6E8A-4147-A177-3AD203B41FA5}">
-                      <a16:colId xmlns:a16="http://schemas.microsoft.com/office/drawing/2014/main" val="20006"/>
-                    </a:ext>
-                  </a:extLst>
-                </a:gridCol>
-                <a:gridCol w="1013460">
-                  <a:extLst>
-                    <a:ext uri="{9D8B030D-6E8A-4147-A177-3AD203B41FA5}">
-                      <a16:colId xmlns:a16="http://schemas.microsoft.com/office/drawing/2014/main" val="20007"/>
-                    </a:ext>
-                  </a:extLst>
-                </a:gridCol>
+                <a:gridCol w="1013460"/>
+                <a:gridCol w="1013460"/>
+                <a:gridCol w="1013460"/>
+                <a:gridCol w="1013460"/>
+                <a:gridCol w="1013460"/>
+                <a:gridCol w="1013460"/>
+                <a:gridCol w="1013460"/>
+                <a:gridCol w="1013460"/>
               </a:tblGrid>
               <a:tr h="381000">
                 <a:tc>
@@ -18377,6 +18488,7 @@
                         <a:rPr lang="zh-CN" altLang="en-US"/>
                         <a:t>港科大</a:t>
                       </a:r>
+                      <a:endParaRPr lang="zh-CN" altLang="en-US"/>
                     </a:p>
                   </a:txBody>
                   <a:tcPr anchor="ctr">
@@ -18419,6 +18531,7 @@
                         <a:rPr lang="zh-CN" altLang="en-US"/>
                         <a:t>在</a:t>
                       </a:r>
+                      <a:endParaRPr lang="zh-CN" altLang="en-US"/>
                     </a:p>
                   </a:txBody>
                   <a:tcPr anchor="ctr">
@@ -18461,6 +18574,7 @@
                         <a:rPr lang="zh-CN" altLang="en-US"/>
                         <a:t>今年</a:t>
                       </a:r>
+                      <a:endParaRPr lang="zh-CN" altLang="en-US"/>
                     </a:p>
                   </a:txBody>
                   <a:tcPr anchor="ctr">
@@ -18503,6 +18617,7 @@
                         <a:rPr lang="zh-CN" altLang="en-US"/>
                         <a:t>排名</a:t>
                       </a:r>
+                      <a:endParaRPr lang="zh-CN" altLang="en-US"/>
                     </a:p>
                   </a:txBody>
                   <a:tcPr anchor="ctr">
@@ -18545,6 +18660,7 @@
                         <a:rPr lang="zh-CN" altLang="en-US"/>
                         <a:t>第</a:t>
                       </a:r>
+                      <a:endParaRPr lang="zh-CN" altLang="en-US"/>
                     </a:p>
                   </a:txBody>
                   <a:tcPr anchor="ctr">
@@ -18587,6 +18703,7 @@
                         <a:rPr lang="en-US" altLang="zh-CN"/>
                         <a:t>33</a:t>
                       </a:r>
+                      <a:endParaRPr lang="en-US" altLang="zh-CN"/>
                     </a:p>
                   </a:txBody>
                   <a:tcPr anchor="ctr">
@@ -18629,6 +18746,7 @@
                         <a:rPr lang="zh-CN" altLang="en-US"/>
                         <a:t>位</a:t>
                       </a:r>
+                      <a:endParaRPr lang="zh-CN" altLang="en-US"/>
                     </a:p>
                   </a:txBody>
                   <a:tcPr anchor="ctr">
@@ -18702,11 +18820,6 @@
                     <a:noFill/>
                   </a:tcPr>
                 </a:tc>
-                <a:extLst>
-                  <a:ext uri="{0D108BD9-81ED-4DB2-BD59-A6C34878D82A}">
-                    <a16:rowId xmlns:a16="http://schemas.microsoft.com/office/drawing/2014/main" val="10000"/>
-                  </a:ext>
-                </a:extLst>
               </a:tr>
             </a:tbl>
           </a:graphicData>
@@ -19049,6 +19162,11 @@
               </a:rPr>
               <a:t>排名</a:t>
             </a:r>
+            <a:endParaRPr lang="zh-CN" altLang="en-US" b="1">
+              <a:solidFill>
+                <a:srgbClr val="69F0AE"/>
+              </a:solidFill>
+            </a:endParaRPr>
           </a:p>
         </p:txBody>
       </p:sp>
@@ -19083,6 +19201,11 @@
               </a:rPr>
               <a:t>第</a:t>
             </a:r>
+            <a:endParaRPr lang="zh-CN" altLang="en-US" b="1">
+              <a:solidFill>
+                <a:srgbClr val="69F0AE"/>
+              </a:solidFill>
+            </a:endParaRPr>
           </a:p>
         </p:txBody>
       </p:sp>
@@ -19117,6 +19240,11 @@
               </a:rPr>
               <a:t>33</a:t>
             </a:r>
+            <a:endParaRPr lang="en-US" altLang="zh-CN" b="1">
+              <a:solidFill>
+                <a:srgbClr val="69F0AE"/>
+              </a:solidFill>
+            </a:endParaRPr>
           </a:p>
         </p:txBody>
       </p:sp>
@@ -19151,6 +19279,11 @@
               </a:rPr>
               <a:t>位</a:t>
             </a:r>
+            <a:endParaRPr lang="zh-CN" altLang="en-US" b="1">
+              <a:solidFill>
+                <a:srgbClr val="69F0AE"/>
+              </a:solidFill>
+            </a:endParaRPr>
           </a:p>
         </p:txBody>
       </p:sp>
@@ -19185,6 +19318,11 @@
               </a:rPr>
               <a:t>。</a:t>
             </a:r>
+            <a:endParaRPr lang="zh-CN" altLang="en-US" b="1">
+              <a:solidFill>
+                <a:srgbClr val="69F0AE"/>
+              </a:solidFill>
+            </a:endParaRPr>
           </a:p>
         </p:txBody>
       </p:sp>
@@ -19219,6 +19357,11 @@
               </a:rPr>
               <a:t>&lt;|end|&gt;</a:t>
             </a:r>
+            <a:endParaRPr lang="en-US" altLang="zh-CN" sz="1400" b="1">
+              <a:solidFill>
+                <a:srgbClr val="69F0AE"/>
+              </a:solidFill>
+            </a:endParaRPr>
           </a:p>
         </p:txBody>
       </p:sp>
@@ -20162,13 +20305,7 @@
       </p:grpSpPr>
       <p:sp>
         <p:nvSpPr>
-          <p:cNvPr id="2" name="标题 1">
-            <a:extLst>
-              <a:ext uri="{FF2B5EF4-FFF2-40B4-BE49-F238E27FC236}">
-                <a16:creationId xmlns:a16="http://schemas.microsoft.com/office/drawing/2014/main" id="{A14F1167-D6CD-9098-8D4D-F1097D7C6A96}"/>
-              </a:ext>
-            </a:extLst>
-          </p:cNvPr>
+          <p:cNvPr id="2" name="标题 1"/>
           <p:cNvSpPr>
             <a:spLocks noGrp="1"/>
           </p:cNvSpPr>
@@ -20185,18 +20322,13 @@
               <a:rPr lang="zh-CN" altLang="en-US" dirty="0"/>
               <a:t>续写文本的选择</a:t>
             </a:r>
+            <a:endParaRPr lang="zh-CN" altLang="en-US" dirty="0"/>
           </a:p>
         </p:txBody>
       </p:sp>
       <p:sp>
         <p:nvSpPr>
-          <p:cNvPr id="4" name="灯片编号占位符 3">
-            <a:extLst>
-              <a:ext uri="{FF2B5EF4-FFF2-40B4-BE49-F238E27FC236}">
-                <a16:creationId xmlns:a16="http://schemas.microsoft.com/office/drawing/2014/main" id="{3687A239-CD4C-D4E7-35F8-15C529A0CFFE}"/>
-              </a:ext>
-            </a:extLst>
-          </p:cNvPr>
+          <p:cNvPr id="4" name="灯片编号占位符 3"/>
           <p:cNvSpPr>
             <a:spLocks noGrp="1"/>
           </p:cNvSpPr>
@@ -20211,7 +20343,6 @@
           <a:p>
             <a:fld id="{49AE70B2-8BF9-45C0-BB95-33D1B9D3A854}" type="slidenum">
               <a:rPr lang="zh-CN" altLang="en-US" smtClean="0"/>
-              <a:t>7</a:t>
             </a:fld>
             <a:endParaRPr lang="en-US" altLang="zh-CN"/>
           </a:p>
@@ -20219,21 +20350,9 @@
       </p:sp>
       <p:graphicFrame>
         <p:nvGraphicFramePr>
-          <p:cNvPr id="5" name="表格 4">
-            <a:extLst>
-              <a:ext uri="{FF2B5EF4-FFF2-40B4-BE49-F238E27FC236}">
-                <a16:creationId xmlns:a16="http://schemas.microsoft.com/office/drawing/2014/main" id="{5D09A897-3D74-0C58-9EA6-A733EB692FDA}"/>
-              </a:ext>
-            </a:extLst>
-          </p:cNvPr>
+          <p:cNvPr id="5" name="表格 4"/>
           <p:cNvGraphicFramePr/>
-          <p:nvPr>
-            <p:extLst>
-              <p:ext uri="{D42A27DB-BD31-4B8C-83A1-F6EECF244321}">
-                <p14:modId xmlns:p14="http://schemas.microsoft.com/office/powerpoint/2010/main" val="3375743139"/>
-              </p:ext>
-            </p:extLst>
-          </p:nvPr>
+          <p:nvPr/>
         </p:nvGraphicFramePr>
         <p:xfrm>
           <a:off x="2280386" y="2408765"/>
@@ -20246,34 +20365,10 @@
                 <a:tableStyleId>{5C22544A-7EE6-4342-B048-85BDC9FD1C3A}</a:tableStyleId>
               </a:tblPr>
               <a:tblGrid>
-                <a:gridCol w="1013460">
-                  <a:extLst>
-                    <a:ext uri="{9D8B030D-6E8A-4147-A177-3AD203B41FA5}">
-                      <a16:colId xmlns:a16="http://schemas.microsoft.com/office/drawing/2014/main" val="20000"/>
-                    </a:ext>
-                  </a:extLst>
-                </a:gridCol>
-                <a:gridCol w="1013460">
-                  <a:extLst>
-                    <a:ext uri="{9D8B030D-6E8A-4147-A177-3AD203B41FA5}">
-                      <a16:colId xmlns:a16="http://schemas.microsoft.com/office/drawing/2014/main" val="20001"/>
-                    </a:ext>
-                  </a:extLst>
-                </a:gridCol>
-                <a:gridCol w="1013460">
-                  <a:extLst>
-                    <a:ext uri="{9D8B030D-6E8A-4147-A177-3AD203B41FA5}">
-                      <a16:colId xmlns:a16="http://schemas.microsoft.com/office/drawing/2014/main" val="20002"/>
-                    </a:ext>
-                  </a:extLst>
-                </a:gridCol>
-                <a:gridCol w="1013460">
-                  <a:extLst>
-                    <a:ext uri="{9D8B030D-6E8A-4147-A177-3AD203B41FA5}">
-                      <a16:colId xmlns:a16="http://schemas.microsoft.com/office/drawing/2014/main" val="20003"/>
-                    </a:ext>
-                  </a:extLst>
-                </a:gridCol>
+                <a:gridCol w="1013460"/>
+                <a:gridCol w="1013460"/>
+                <a:gridCol w="1013460"/>
+                <a:gridCol w="1013460"/>
               </a:tblGrid>
               <a:tr h="381000">
                 <a:tc>
@@ -20288,6 +20383,7 @@
                         <a:rPr lang="zh-CN" altLang="en-US" dirty="0"/>
                         <a:t>港科大</a:t>
                       </a:r>
+                      <a:endParaRPr lang="zh-CN" altLang="en-US" dirty="0"/>
                     </a:p>
                   </a:txBody>
                   <a:tcPr anchor="ctr">
@@ -20330,6 +20426,7 @@
                         <a:rPr lang="zh-CN" altLang="en-US"/>
                         <a:t>在</a:t>
                       </a:r>
+                      <a:endParaRPr lang="zh-CN" altLang="en-US"/>
                     </a:p>
                   </a:txBody>
                   <a:tcPr anchor="ctr">
@@ -20372,6 +20469,7 @@
                         <a:rPr lang="zh-CN" altLang="en-US" dirty="0"/>
                         <a:t>今年</a:t>
                       </a:r>
+                      <a:endParaRPr lang="zh-CN" altLang="en-US" dirty="0"/>
                     </a:p>
                   </a:txBody>
                   <a:tcPr anchor="ctr">
@@ -20445,11 +20543,6 @@
                     <a:noFill/>
                   </a:tcPr>
                 </a:tc>
-                <a:extLst>
-                  <a:ext uri="{0D108BD9-81ED-4DB2-BD59-A6C34878D82A}">
-                    <a16:rowId xmlns:a16="http://schemas.microsoft.com/office/drawing/2014/main" val="10000"/>
-                  </a:ext>
-                </a:extLst>
               </a:tr>
             </a:tbl>
           </a:graphicData>
@@ -20457,13 +20550,7 @@
       </p:graphicFrame>
       <p:sp>
         <p:nvSpPr>
-          <p:cNvPr id="6" name="文本框 5">
-            <a:extLst>
-              <a:ext uri="{FF2B5EF4-FFF2-40B4-BE49-F238E27FC236}">
-                <a16:creationId xmlns:a16="http://schemas.microsoft.com/office/drawing/2014/main" id="{76A8BBFF-8F67-0EFF-4572-BDA321445586}"/>
-              </a:ext>
-            </a:extLst>
-          </p:cNvPr>
+          <p:cNvPr id="6" name="文本框 5"/>
           <p:cNvSpPr txBox="1"/>
           <p:nvPr/>
         </p:nvSpPr>
@@ -20492,18 +20579,17 @@
               </a:rPr>
               <a:t>排名</a:t>
             </a:r>
+            <a:endParaRPr lang="zh-CN" altLang="en-US" b="1" dirty="0">
+              <a:solidFill>
+                <a:srgbClr val="69F0AE"/>
+              </a:solidFill>
+            </a:endParaRPr>
           </a:p>
         </p:txBody>
       </p:sp>
       <p:sp>
         <p:nvSpPr>
-          <p:cNvPr id="7" name="文本框 6">
-            <a:extLst>
-              <a:ext uri="{FF2B5EF4-FFF2-40B4-BE49-F238E27FC236}">
-                <a16:creationId xmlns:a16="http://schemas.microsoft.com/office/drawing/2014/main" id="{4FAC4B57-40B0-4BF1-FE7B-3F4EEE321C0A}"/>
-              </a:ext>
-            </a:extLst>
-          </p:cNvPr>
+          <p:cNvPr id="7" name="文本框 6"/>
           <p:cNvSpPr txBox="1"/>
           <p:nvPr/>
         </p:nvSpPr>
@@ -20532,18 +20618,17 @@
               </a:rPr>
               <a:t>建造</a:t>
             </a:r>
+            <a:endParaRPr lang="zh-CN" altLang="en-US" b="1" dirty="0">
+              <a:solidFill>
+                <a:srgbClr val="69F0AE"/>
+              </a:solidFill>
+            </a:endParaRPr>
           </a:p>
         </p:txBody>
       </p:sp>
       <p:sp>
         <p:nvSpPr>
-          <p:cNvPr id="8" name="文本框 7">
-            <a:extLst>
-              <a:ext uri="{FF2B5EF4-FFF2-40B4-BE49-F238E27FC236}">
-                <a16:creationId xmlns:a16="http://schemas.microsoft.com/office/drawing/2014/main" id="{2517A469-7016-34EC-D6E9-9059E5F76C0A}"/>
-              </a:ext>
-            </a:extLst>
-          </p:cNvPr>
+          <p:cNvPr id="8" name="文本框 7"/>
           <p:cNvSpPr txBox="1"/>
           <p:nvPr/>
         </p:nvSpPr>
@@ -20572,18 +20657,17 @@
               </a:rPr>
               <a:t>开展</a:t>
             </a:r>
+            <a:endParaRPr lang="zh-CN" altLang="en-US" b="1" dirty="0">
+              <a:solidFill>
+                <a:srgbClr val="69F0AE"/>
+              </a:solidFill>
+            </a:endParaRPr>
           </a:p>
         </p:txBody>
       </p:sp>
       <p:sp>
         <p:nvSpPr>
-          <p:cNvPr id="9" name="文本框 8">
-            <a:extLst>
-              <a:ext uri="{FF2B5EF4-FFF2-40B4-BE49-F238E27FC236}">
-                <a16:creationId xmlns:a16="http://schemas.microsoft.com/office/drawing/2014/main" id="{8ED7EC86-39DD-7436-7E17-F7B485527268}"/>
-              </a:ext>
-            </a:extLst>
-          </p:cNvPr>
+          <p:cNvPr id="9" name="文本框 8"/>
           <p:cNvSpPr txBox="1"/>
           <p:nvPr/>
         </p:nvSpPr>
@@ -20612,18 +20696,17 @@
               </a:rPr>
               <a:t>有</a:t>
             </a:r>
+            <a:endParaRPr lang="zh-CN" altLang="en-US" b="1" dirty="0">
+              <a:solidFill>
+                <a:srgbClr val="69F0AE"/>
+              </a:solidFill>
+            </a:endParaRPr>
           </a:p>
         </p:txBody>
       </p:sp>
       <p:sp>
         <p:nvSpPr>
-          <p:cNvPr id="10" name="文本框 9">
-            <a:extLst>
-              <a:ext uri="{FF2B5EF4-FFF2-40B4-BE49-F238E27FC236}">
-                <a16:creationId xmlns:a16="http://schemas.microsoft.com/office/drawing/2014/main" id="{691D6FF0-1160-8CDE-AE0B-03C6C0E3ED91}"/>
-              </a:ext>
-            </a:extLst>
-          </p:cNvPr>
+          <p:cNvPr id="10" name="文本框 9"/>
           <p:cNvSpPr txBox="1"/>
           <p:nvPr/>
         </p:nvSpPr>
@@ -20662,13 +20745,7 @@
       </p:sp>
       <p:grpSp>
         <p:nvGrpSpPr>
-          <p:cNvPr id="21" name="组合 20">
-            <a:extLst>
-              <a:ext uri="{FF2B5EF4-FFF2-40B4-BE49-F238E27FC236}">
-                <a16:creationId xmlns:a16="http://schemas.microsoft.com/office/drawing/2014/main" id="{712C7E7D-BDAB-5686-8E59-0BD3AFD7F23C}"/>
-              </a:ext>
-            </a:extLst>
-          </p:cNvPr>
+          <p:cNvPr id="21" name="组合 20"/>
           <p:cNvGrpSpPr/>
           <p:nvPr/>
         </p:nvGrpSpPr>
@@ -20682,13 +20759,7 @@
         </p:grpSpPr>
         <p:sp>
           <p:nvSpPr>
-            <p:cNvPr id="11" name="右大括号 10">
-              <a:extLst>
-                <a:ext uri="{FF2B5EF4-FFF2-40B4-BE49-F238E27FC236}">
-                  <a16:creationId xmlns:a16="http://schemas.microsoft.com/office/drawing/2014/main" id="{5D490C48-05A5-3993-8A0A-2D9BB4BBF8D0}"/>
-                </a:ext>
-              </a:extLst>
-            </p:cNvPr>
+            <p:cNvPr id="11" name="右大括号 10"/>
             <p:cNvSpPr/>
             <p:nvPr/>
           </p:nvSpPr>
@@ -20741,13 +20812,7 @@
         </p:sp>
         <p:sp>
           <p:nvSpPr>
-            <p:cNvPr id="12" name="文本框 11">
-              <a:extLst>
-                <a:ext uri="{FF2B5EF4-FFF2-40B4-BE49-F238E27FC236}">
-                  <a16:creationId xmlns:a16="http://schemas.microsoft.com/office/drawing/2014/main" id="{78FD4544-5543-9CE8-90A9-EFE71646CCA9}"/>
-                </a:ext>
-              </a:extLst>
-            </p:cNvPr>
+            <p:cNvPr id="12" name="文本框 11"/>
             <p:cNvSpPr txBox="1"/>
             <p:nvPr/>
           </p:nvSpPr>
@@ -20776,19 +20841,18 @@
                 </a:rPr>
                 <a:t>温度</a:t>
               </a:r>
+              <a:endParaRPr lang="zh-CN" altLang="en-US" b="1" dirty="0">
+                <a:solidFill>
+                  <a:srgbClr val="B388FF"/>
+                </a:solidFill>
+              </a:endParaRPr>
             </a:p>
           </p:txBody>
         </p:sp>
       </p:grpSp>
       <p:grpSp>
         <p:nvGrpSpPr>
-          <p:cNvPr id="22" name="组合 21">
-            <a:extLst>
-              <a:ext uri="{FF2B5EF4-FFF2-40B4-BE49-F238E27FC236}">
-                <a16:creationId xmlns:a16="http://schemas.microsoft.com/office/drawing/2014/main" id="{7F41D61D-DA5E-9626-CCD4-68C58BA20958}"/>
-              </a:ext>
-            </a:extLst>
-          </p:cNvPr>
+          <p:cNvPr id="22" name="组合 21"/>
           <p:cNvGrpSpPr/>
           <p:nvPr/>
         </p:nvGrpSpPr>
@@ -20802,13 +20866,7 @@
         </p:grpSpPr>
         <p:sp>
           <p:nvSpPr>
-            <p:cNvPr id="14" name="右大括号 13">
-              <a:extLst>
-                <a:ext uri="{FF2B5EF4-FFF2-40B4-BE49-F238E27FC236}">
-                  <a16:creationId xmlns:a16="http://schemas.microsoft.com/office/drawing/2014/main" id="{03657EE3-5947-CCFF-E41F-E60DF71C48C2}"/>
-                </a:ext>
-              </a:extLst>
-            </p:cNvPr>
+            <p:cNvPr id="14" name="右大括号 13"/>
             <p:cNvSpPr/>
             <p:nvPr/>
           </p:nvSpPr>
@@ -20861,13 +20919,7 @@
         </p:sp>
         <p:sp>
           <p:nvSpPr>
-            <p:cNvPr id="16" name="文本框 15">
-              <a:extLst>
-                <a:ext uri="{FF2B5EF4-FFF2-40B4-BE49-F238E27FC236}">
-                  <a16:creationId xmlns:a16="http://schemas.microsoft.com/office/drawing/2014/main" id="{A1F5632F-A8E8-DE1D-84D5-2EB9FA282C18}"/>
-                </a:ext>
-              </a:extLst>
-            </p:cNvPr>
+            <p:cNvPr id="16" name="文本框 15"/>
             <p:cNvSpPr txBox="1"/>
             <p:nvPr/>
           </p:nvSpPr>
@@ -20896,19 +20948,18 @@
                 </a:rPr>
                 <a:t>温度 ↑</a:t>
               </a:r>
+              <a:endParaRPr lang="zh-CN" altLang="en-US" b="1" dirty="0">
+                <a:solidFill>
+                  <a:srgbClr val="B388FF"/>
+                </a:solidFill>
+              </a:endParaRPr>
             </a:p>
           </p:txBody>
         </p:sp>
       </p:grpSp>
       <p:grpSp>
         <p:nvGrpSpPr>
-          <p:cNvPr id="23" name="组合 22">
-            <a:extLst>
-              <a:ext uri="{FF2B5EF4-FFF2-40B4-BE49-F238E27FC236}">
-                <a16:creationId xmlns:a16="http://schemas.microsoft.com/office/drawing/2014/main" id="{D9505308-F0FF-88D1-11DF-6C3A46693029}"/>
-              </a:ext>
-            </a:extLst>
-          </p:cNvPr>
+          <p:cNvPr id="23" name="组合 22"/>
           <p:cNvGrpSpPr/>
           <p:nvPr/>
         </p:nvGrpSpPr>
@@ -20922,13 +20973,7 @@
         </p:grpSpPr>
         <p:sp>
           <p:nvSpPr>
-            <p:cNvPr id="18" name="右大括号 17">
-              <a:extLst>
-                <a:ext uri="{FF2B5EF4-FFF2-40B4-BE49-F238E27FC236}">
-                  <a16:creationId xmlns:a16="http://schemas.microsoft.com/office/drawing/2014/main" id="{1D37EBCA-B911-758F-3605-F2DB7CFC5686}"/>
-                </a:ext>
-              </a:extLst>
-            </p:cNvPr>
+            <p:cNvPr id="18" name="右大括号 17"/>
             <p:cNvSpPr/>
             <p:nvPr/>
           </p:nvSpPr>
@@ -20981,13 +21026,7 @@
         </p:sp>
         <p:sp>
           <p:nvSpPr>
-            <p:cNvPr id="20" name="文本框 19">
-              <a:extLst>
-                <a:ext uri="{FF2B5EF4-FFF2-40B4-BE49-F238E27FC236}">
-                  <a16:creationId xmlns:a16="http://schemas.microsoft.com/office/drawing/2014/main" id="{D7F9B6DE-4C6E-338D-5463-52006710A52B}"/>
-                </a:ext>
-              </a:extLst>
-            </p:cNvPr>
+            <p:cNvPr id="20" name="文本框 19"/>
             <p:cNvSpPr txBox="1"/>
             <p:nvPr/>
           </p:nvSpPr>
@@ -21016,16 +21055,16 @@
                 </a:rPr>
                 <a:t>温度 ↓</a:t>
               </a:r>
+              <a:endParaRPr lang="zh-CN" altLang="en-US" b="1" dirty="0">
+                <a:solidFill>
+                  <a:srgbClr val="B388FF"/>
+                </a:solidFill>
+              </a:endParaRPr>
             </a:p>
           </p:txBody>
         </p:sp>
       </p:grpSp>
     </p:spTree>
-    <p:extLst>
-      <p:ext uri="{BB962C8B-B14F-4D97-AF65-F5344CB8AC3E}">
-        <p14:creationId xmlns:p14="http://schemas.microsoft.com/office/powerpoint/2010/main" val="3115261569"/>
-      </p:ext>
-    </p:extLst>
   </p:cSld>
   <p:clrMapOvr>
     <a:masterClrMapping/>
@@ -21554,6 +21593,7 @@
               <a:rPr lang="zh-CN" altLang="en-US" dirty="0"/>
               <a:t>把大模型看作一个函数</a:t>
             </a:r>
+            <a:endParaRPr lang="zh-CN" altLang="en-US" dirty="0"/>
           </a:p>
         </p:txBody>
       </p:sp>
@@ -21576,6 +21616,7 @@
               <a:rPr lang="zh-CN" altLang="en-US" dirty="0"/>
               <a:t>无状态</a:t>
             </a:r>
+            <a:endParaRPr lang="zh-CN" altLang="en-US" dirty="0"/>
           </a:p>
           <a:p>
             <a:pPr lvl="1"/>
@@ -21583,12 +21624,14 @@
               <a:rPr lang="zh-CN" altLang="en-US" dirty="0"/>
               <a:t>在计算时不会动态更新函数的定义本身</a:t>
             </a:r>
+            <a:endParaRPr lang="zh-CN" altLang="en-US" dirty="0"/>
           </a:p>
           <a:p>
             <a:r>
               <a:rPr lang="zh-CN" altLang="en-US" dirty="0"/>
               <a:t>模型数据有截止日期</a:t>
             </a:r>
+            <a:endParaRPr lang="zh-CN" altLang="en-US" dirty="0"/>
           </a:p>
           <a:p>
             <a:pPr lvl="1"/>
@@ -21596,6 +21639,7 @@
               <a:rPr lang="zh-CN" altLang="en-US" dirty="0"/>
               <a:t>模型参数在固定到一个特定的版本后才发布</a:t>
             </a:r>
+            <a:endParaRPr lang="zh-CN" altLang="en-US" dirty="0"/>
           </a:p>
           <a:p>
             <a:pPr lvl="0"/>
@@ -21603,6 +21647,7 @@
               <a:rPr lang="zh-CN" dirty="0"/>
               <a:t>本身不会改变外部环境，只能调用工具</a:t>
             </a:r>
+            <a:endParaRPr lang="zh-CN" dirty="0"/>
           </a:p>
         </p:txBody>
       </p:sp>
@@ -21662,6 +21707,7 @@
                   <a:rPr lang="en-US" altLang="zh-CN" dirty="0"/>
                   <a:t>)</a:t>
                 </a:r>
+                <a:endParaRPr lang="en-US" altLang="zh-CN" dirty="0"/>
               </a:p>
               <a:p>
                 <a:pPr>
@@ -21723,6 +21769,9 @@
                   </a:rPr>
                   <a:t>工具使用结果）</a:t>
                 </a:r>
+                <a:endParaRPr lang="zh-CN" altLang="en-US" sz="2000" b="0" dirty="0">
+                  <a:sym typeface="+mn-ea"/>
+                </a:endParaRPr>
               </a:p>
             </p:txBody>
           </p:sp>
@@ -21732,15 +21781,15 @@
             <p:nvSpPr>
               <p:cNvPr id="6" name="内容占位符 5"/>
               <p:cNvSpPr>
-                <a:spLocks noGrp="1" noRot="1" noChangeAspect="1" noMove="1" noResize="1" noEditPoints="1" noAdjustHandles="1" noChangeArrowheads="1" noChangeShapeType="1" noTextEdit="1"/>
+                <a:spLocks noRot="1" noChangeAspect="1" noMove="1" noResize="1" noEditPoints="1" noAdjustHandles="1" noChangeArrowheads="1" noChangeShapeType="1" noTextEdit="1"/>
               </p:cNvSpPr>
               <p:nvPr>
                 <p:ph idx="13"/>
               </p:nvPr>
             </p:nvSpPr>
             <p:spPr>
-              <a:blipFill>
-                <a:blip r:embed="rId3"/>
+              <a:blipFill rotWithShape="1">
+                <a:blip r:embed="rId1"/>
                 <a:stretch>
                   <a:fillRect/>
                 </a:stretch>
@@ -21778,7 +21827,6 @@
           <a:p>
             <a:fld id="{49AE70B2-8BF9-45C0-BB95-33D1B9D3A854}" type="slidenum">
               <a:rPr lang="zh-CN" altLang="en-US" smtClean="0"/>
-              <a:t>8</a:t>
             </a:fld>
             <a:endParaRPr lang="en-US" altLang="zh-CN"/>
           </a:p>
@@ -22303,6 +22351,7 @@
               <a:rPr lang="zh-CN" altLang="en-US"/>
               <a:t>驾驭层</a:t>
             </a:r>
+            <a:endParaRPr lang="zh-CN" altLang="en-US"/>
           </a:p>
         </p:txBody>
       </p:sp>
@@ -22328,6 +22377,7 @@
               <a:rPr lang="zh-CN" altLang="en-US" sz="8800" dirty="0"/>
               <a:t>！</a:t>
             </a:r>
+            <a:endParaRPr lang="zh-CN" altLang="en-US" sz="8800" dirty="0"/>
           </a:p>
         </p:txBody>
       </p:sp>
@@ -22368,6 +22418,9 @@
               </a:rPr>
               <a:t>生成</a:t>
             </a:r>
+            <a:endParaRPr lang="zh-CN" altLang="en-US" sz="2400" b="1">
+              <a:ea typeface="SimSun" charset="0"/>
+            </a:endParaRPr>
           </a:p>
         </p:txBody>
       </p:sp>
@@ -22388,7 +22441,6 @@
           <a:p>
             <a:fld id="{49AE70B2-8BF9-45C0-BB95-33D1B9D3A854}" type="slidenum">
               <a:rPr lang="zh-CN" altLang="en-US" smtClean="0"/>
-              <a:t>9</a:t>
             </a:fld>
             <a:endParaRPr lang="en-US" altLang="zh-CN"/>
           </a:p>
@@ -22645,8 +22697,6 @@
       </a:bgFillStyleLst>
     </a:fmtScheme>
   </a:themeElements>
-  <a:objectDefaults/>
-  <a:extraClrSchemeLst/>
   <a:extLst>
     <a:ext uri="{05A4C25C-085E-4340-85A3-A5531E510DB2}">
       <thm15:themeFamily xmlns:thm15="http://schemas.microsoft.com/office/thememl/2012/main" name="Office Theme" id="{62F939B6-93AF-4DB8-9C6B-D6C7DFDC589F}" vid="{4A3C46E8-61CC-4603-A589-7422A47A8E4A}"/>
@@ -22898,8 +22948,6 @@
       </a:bgFillStyleLst>
     </a:fmtScheme>
   </a:themeElements>
-  <a:objectDefaults/>
-  <a:extraClrSchemeLst/>
   <a:extLst>
     <a:ext uri="{05A4C25C-085E-4340-85A3-A5531E510DB2}">
       <thm15:themeFamily xmlns:thm15="http://schemas.microsoft.com/office/thememl/2012/main" name="Office Theme" id="{62F939B6-93AF-4DB8-9C6B-D6C7DFDC589F}" vid="{4A3C46E8-61CC-4603-A589-7422A47A8E4A}"/>
@@ -23151,8 +23199,6 @@
       </a:bgFillStyleLst>
     </a:fmtScheme>
   </a:themeElements>
-  <a:objectDefaults/>
-  <a:extraClrSchemeLst/>
   <a:extLst>
     <a:ext uri="{05A4C25C-085E-4340-85A3-A5531E510DB2}">
       <thm15:themeFamily xmlns:thm15="http://schemas.microsoft.com/office/thememl/2012/main" name="Office Theme" id="{62F939B6-93AF-4DB8-9C6B-D6C7DFDC589F}" vid="{4A3C46E8-61CC-4603-A589-7422A47A8E4A}"/>
